--- a/public/templates/000_pm_suite/01_프로젝트 관리/01_통합관리/보고체계_관리_계획서_템플릿.pptx
+++ b/public/templates/000_pm_suite/01_프로젝트 관리/01_통합관리/보고체계_관리_계획서_템플릿.pptx
@@ -3265,7 +3265,7 @@
                 </a:solidFill>
                 <a:latin typeface="맑은 고딕"/>
               </a:rPr>
-              <a:t>산출물 ID : GRV_MAN_080   |   버전 : v1.0   |   표준 관리 템플릿</a:t>
+              <a:t>산출물 ID : EMP_MAN_080   |   버전 : v1.0   |   표준 관리 템플릿</a:t>
             </a:r>
           </a:p>
         </p:txBody>
@@ -3350,7 +3350,7 @@
                 </a:solidFill>
                 <a:latin typeface="맑은 고딕"/>
               </a:rPr>
-              <a:t>아모레퍼시픽 Claimworks-Claims AI 시스템 구축</a:t>
+              <a:t>한빛글로벌 SyncGuard AI 시스템 구축</a:t>
             </a:r>
           </a:p>
         </p:txBody>
@@ -3476,7 +3476,7 @@
                 </a:solidFill>
                 <a:latin typeface="맑은 고딕"/>
               </a:rPr>
-              <a:t>발주사(아모레퍼시픽) · 주관수행사(그로브소프트) · 협력사(아이시프트) 간 정기·단계별·수시 보고 체계, 회의체 운영, 이슈 에스컬레이션 및 협업 채널 기준을 정의합니다.</a:t>
+              <a:t>발주사(한빛글로벌) · 주관수행사(엠파시) · 협력사(데이터브릿지) 간 정기·단계별·수시 보고 체계, 회의체 운영, 이슈 에스컬레이션 및 협업 채널 기준을 정의합니다.</a:t>
             </a:r>
           </a:p>
         </p:txBody>
@@ -3574,7 +3574,7 @@
                           </a:solidFill>
                           <a:latin typeface="맑은 고딕"/>
                         </a:rPr>
-                        <a:t>아모레퍼시픽 Claimworks-Claims AI 시스템 구축 용역</a:t>
+                        <a:t>한빛글로벌 SyncGuard AI 시스템 구축 용역</a:t>
                       </a:r>
                     </a:p>
                   </a:txBody>
@@ -3778,7 +3778,7 @@
                           </a:solidFill>
                           <a:latin typeface="맑은 고딕"/>
                         </a:rPr>
-                        <a:t>주식회사 아모레퍼시픽 (연구전략Lab / ERP플랫폼기획팀 / RA Lab)</a:t>
+                        <a:t>주식회사 한빛글로벌 (연구전략Lab / ERP플랫폼기획팀 / RA Lab)</a:t>
                       </a:r>
                     </a:p>
                   </a:txBody>
@@ -3880,7 +3880,7 @@
                           </a:solidFill>
                           <a:latin typeface="맑은 고딕"/>
                         </a:rPr>
-                        <a:t>주식회사 그로브소프트 (협력사: ㈜아이시프트)</a:t>
+                        <a:t>주식회사 엠파시 (협력사: ㈜데이터브릿지)</a:t>
                       </a:r>
                     </a:p>
                   </a:txBody>
@@ -4153,7 +4153,7 @@
                           </a:solidFill>
                           <a:latin typeface="맑은 고딕"/>
                         </a:rPr>
-                        <a:t>수행사 (그로브)</a:t>
+                        <a:t>수행사 (엠파시)</a:t>
                       </a:r>
                     </a:p>
                   </a:txBody>
@@ -4203,7 +4203,7 @@
                           </a:solidFill>
                           <a:latin typeface="맑은 고딕"/>
                         </a:rPr>
-                        <a:t>발주사 (아모레)</a:t>
+                        <a:t>발주사 (한빛글로벌)</a:t>
                       </a:r>
                     </a:p>
                   </a:txBody>
@@ -4305,7 +4305,7 @@
                           </a:solidFill>
                           <a:latin typeface="맑은 고딕"/>
                         </a:rPr>
-                        <a:t>김재은 PM</a:t>
+                        <a:t>김태윤 PM</a:t>
                       </a:r>
                     </a:p>
                   </a:txBody>
@@ -4355,7 +4355,7 @@
                           </a:solidFill>
                           <a:latin typeface="맑은 고딕"/>
                         </a:rPr>
-                        <a:t>박주열 PM</a:t>
+                        <a:t>정민수 PM</a:t>
                       </a:r>
                     </a:p>
                   </a:txBody>
@@ -4457,7 +4457,7 @@
                           </a:solidFill>
                           <a:latin typeface="맑은 고딕"/>
                         </a:rPr>
-                        <a:t>오병문 AA</a:t>
+                        <a:t>박준혁 AA</a:t>
                       </a:r>
                     </a:p>
                   </a:txBody>
@@ -4507,7 +4507,7 @@
                           </a:solidFill>
                           <a:latin typeface="맑은 고딕"/>
                         </a:rPr>
-                        <a:t>김경호 PM</a:t>
+                        <a:t>한승우 PM</a:t>
                       </a:r>
                     </a:p>
                   </a:txBody>
@@ -4913,7 +4913,7 @@
                 </a:solidFill>
                 <a:latin typeface="맑은 고딕"/>
               </a:rPr>
-              <a:t>• 본 문서는 전사 표준 프로젝트 관리 템플릿이자 아모레퍼시픽 Claim AI 실전 기준서입니다.</a:t>
+              <a:t>• 본 문서는 전사 표준 프로젝트 관리 템플릿이자 한빛글로벌 SyncGuard AI 실전 기준서입니다.</a:t>
             </a:r>
           </a:p>
           <a:p>
@@ -5053,7 +5053,7 @@
                 </a:solidFill>
                 <a:latin typeface="맑은 고딕"/>
               </a:rPr>
-              <a:t>산출물 ID : GRV_MAN_080  |  버전 : v1.0</a:t>
+              <a:t>산출물 ID : EMP_MAN_080  |  버전 : v1.0</a:t>
             </a:r>
           </a:p>
         </p:txBody>
@@ -5095,7 +5095,7 @@
                 </a:solidFill>
                 <a:latin typeface="맑은 고딕"/>
               </a:rPr>
-              <a:t>8. [템플릿] 주간업무보고서(GRV_MAN_010) 및 회의록(GRV_MAN_020) 표준 구성 가이드</a:t>
+              <a:t>8. [템플릿] 주간업무보고서(EMP_MAN_010) 및 회의록(EMP_MAN_020) 표준 구성 가이드</a:t>
             </a:r>
           </a:p>
         </p:txBody>
@@ -5265,7 +5265,7 @@
                 </a:solidFill>
                 <a:latin typeface="맑은 고딕"/>
               </a:rPr>
-              <a:t>아모레퍼시픽 Claimworks-Claims AI 시스템 구축  |  보고체계 관리 계획서</a:t>
+              <a:t>한빛글로벌 SyncGuard AI 시스템 구축  |  보고체계 관리 계획서</a:t>
             </a:r>
           </a:p>
         </p:txBody>
@@ -5349,7 +5349,7 @@
                 </a:solidFill>
                 <a:latin typeface="맑은 고딕"/>
               </a:rPr>
-              <a:t>발주사 : AMOREPACIFIC   |   수행사 : ㈜그로브소프트 (GROVE)</a:t>
+              <a:t>발주사 : HANBIT GLOBAL   |   수행사 : ㈜엠파시 (Empasy Inc.)</a:t>
             </a:r>
           </a:p>
         </p:txBody>
@@ -5531,7 +5531,7 @@
                 </a:solidFill>
                 <a:latin typeface="맑은 고딕"/>
               </a:rPr>
-              <a:t>주간업무보고서 표준 구성 (GRV_MAN_010_주간업무보고서_YYYYMMDD.pptx)</a:t>
+              <a:t>주간업무보고서 표준 구성 (EMP_MAN_010_주간업무보고서_YYYYMMDD.pptx)</a:t>
             </a:r>
           </a:p>
         </p:txBody>
@@ -5983,7 +5983,7 @@
                 </a:solidFill>
                 <a:latin typeface="맑은 고딕"/>
               </a:rPr>
-              <a:t>회의록 표준 구성 (GRV_MAN_020_YYYYMMDD_회의주제_회의록.docx)</a:t>
+              <a:t>회의록 표준 구성 (EMP_MAN_020_YYYYMMDD_회의주제_회의록.docx)</a:t>
             </a:r>
           </a:p>
         </p:txBody>
@@ -6063,7 +6063,7 @@
                 </a:solidFill>
                 <a:latin typeface="맑은 고딕"/>
               </a:rPr>
-              <a:t>• 참석자 명단 : 발주사(아모레퍼시픽) 참석자 / 수행사(그로브소프트·아이시프트) 참석자</a:t>
+              <a:t>• 참석자 명단 : 발주사(한빛글로벌) 참석자 / 수행사(엠파시·데이터브릿지) 참석자</a:t>
             </a:r>
           </a:p>
           <a:p>
@@ -6383,7 +6383,7 @@
                 </a:solidFill>
                 <a:latin typeface="맑은 고딕"/>
               </a:rPr>
-              <a:t>활용 가이드 : 타 프로젝트 적용 시 프로젝트명, 발주사/수행사 명칭, 연락망(9쪽)만 해당 과제 정보로 교체하면 즉시 표준 보고체계로 운영 가능합니다.</a:t>
+              <a:t>활용 가이드 : 타 프로젝트 적용 시 한빛글로벌 SyncGuard AI, 발주사/수행사 명칭, 연락망(9쪽)만 해당 과제 정보로 교체하면 즉시 표준 보고체계로 운영 가능합니다.</a:t>
             </a:r>
           </a:p>
         </p:txBody>
@@ -6485,7 +6485,7 @@
                 </a:solidFill>
                 <a:latin typeface="맑은 고딕"/>
               </a:rPr>
-              <a:t>산출물 ID : GRV_MAN_080  |  버전 : v1.0</a:t>
+              <a:t>산출물 ID : EMP_MAN_080  |  버전 : v1.0</a:t>
             </a:r>
           </a:p>
         </p:txBody>
@@ -6697,7 +6697,7 @@
                 </a:solidFill>
                 <a:latin typeface="맑은 고딕"/>
               </a:rPr>
-              <a:t>아모레퍼시픽 Claimworks-Claims AI 시스템 구축  |  보고체계 관리 계획서</a:t>
+              <a:t>한빛글로벌 SyncGuard AI 시스템 구축  |  보고체계 관리 계획서</a:t>
             </a:r>
           </a:p>
         </p:txBody>
@@ -6781,7 +6781,7 @@
                 </a:solidFill>
                 <a:latin typeface="맑은 고딕"/>
               </a:rPr>
-              <a:t>발주사 : AMOREPACIFIC   |   수행사 : ㈜그로브소프트 (GROVE)</a:t>
+              <a:t>발주사 : HANBIT GLOBAL   |   수행사 : ㈜엠파시 (Empasy Inc.)</a:t>
             </a:r>
           </a:p>
         </p:txBody>
@@ -7326,7 +7326,7 @@
                           </a:solidFill>
                           <a:latin typeface="맑은 고딕"/>
                         </a:rPr>
-                        <a:t>김재은 PM</a:t>
+                        <a:t>김태윤 PM</a:t>
                       </a:r>
                     </a:p>
                   </a:txBody>
@@ -7578,7 +7578,7 @@
                           </a:solidFill>
                           <a:latin typeface="맑은 고딕"/>
                         </a:rPr>
-                        <a:t>김재은 / 박주열</a:t>
+                        <a:t>김태윤 / 정민수</a:t>
                       </a:r>
                     </a:p>
                   </a:txBody>
@@ -7830,7 +7830,7 @@
                           </a:solidFill>
                           <a:latin typeface="맑은 고딕"/>
                         </a:rPr>
-                        <a:t>황자영 PMO</a:t>
+                        <a:t>이지훈 PMO</a:t>
                       </a:r>
                     </a:p>
                   </a:txBody>
@@ -8122,7 +8122,7 @@
                 </a:solidFill>
                 <a:latin typeface="맑은 고딕"/>
               </a:rPr>
-              <a:t>3. 교체 필수 항목 : [사업명], [발주사/수행사 조직], [사업기간 및 M1~M6 일정], [산출물 ID 체계], [인력/인프라 수량]</a:t>
+              <a:t>3. 교체 필수 항목 : SyncGuard AI 시스템 구축 사업, [발주사/수행사 조직], [사업기간 및 M1~M6 일정], [산출물 ID 체계], [인력/인프라 수량]</a:t>
             </a:r>
           </a:p>
           <a:p>
@@ -8141,7 +8141,7 @@
                 </a:solidFill>
                 <a:latin typeface="맑은 고딕"/>
               </a:rPr>
-              <a:t>4. 연계 문서 : 사업수행계획서(GRV_INT_010), WBS(GRV_INT_020), 주간보고서(GRV_MAN_010), 투입공수(GRV_MAN_050)</a:t>
+              <a:t>4. 연계 문서 : 사업수행계획서(EMP_INT_010), WBS(EMP_INT_020), 주간보고서(EMP_MAN_010), 투입공수(EMP_MAN_050)</a:t>
             </a:r>
           </a:p>
         </p:txBody>
@@ -8653,7 +8653,7 @@
                 </a:solidFill>
                 <a:latin typeface="맑은 고딕"/>
               </a:rPr>
-              <a:t>발주사(연구전략/ERP/RA)·주관사(그로브소프트)·협력사(아이시프트) 소통 구조</a:t>
+              <a:t>발주사(연구전략/ERP/RA)·주관사(엠파시)·협력사(데이터브릿지) 소통 구조</a:t>
             </a:r>
           </a:p>
         </p:txBody>
@@ -10333,7 +10333,7 @@
                 </a:solidFill>
                 <a:latin typeface="맑은 고딕"/>
               </a:rPr>
-              <a:t>산출물 ID : GRV_MAN_080  |  버전 : v1.0</a:t>
+              <a:t>산출물 ID : EMP_MAN_080  |  버전 : v1.0</a:t>
             </a:r>
           </a:p>
         </p:txBody>
@@ -10545,7 +10545,7 @@
                 </a:solidFill>
                 <a:latin typeface="맑은 고딕"/>
               </a:rPr>
-              <a:t>아모레퍼시픽 Claimworks-Claims AI 시스템 구축  |  보고체계 관리 계획서</a:t>
+              <a:t>한빛글로벌 SyncGuard AI 시스템 구축  |  보고체계 관리 계획서</a:t>
             </a:r>
           </a:p>
         </p:txBody>
@@ -10629,7 +10629,7 @@
                 </a:solidFill>
                 <a:latin typeface="맑은 고딕"/>
               </a:rPr>
-              <a:t>발주사 : AMOREPACIFIC   |   수행사 : ㈜그로브소프트 (GROVE)</a:t>
+              <a:t>발주사 : HANBIT GLOBAL   |   수행사 : ㈜엠파시 (Empasy Inc.)</a:t>
             </a:r>
           </a:p>
         </p:txBody>
@@ -10853,7 +10853,7 @@
                 </a:solidFill>
                 <a:latin typeface="맑은 고딕"/>
               </a:rPr>
-              <a:t>• 발주사 현업 PM(박주열) · 기술 PM(김경호) ↔ 수행사 수행 PM(김재은) · 총괄 AA(오병문)을 공식 소통 창구로 단일화</a:t>
+              <a:t>• 발주사 현업 PM(정민수) · 기술 PM(한승우) ↔ 수행사 수행 PM(김태윤) · 총괄 AA(박준혁)을 공식 소통 창구로 단일화</a:t>
             </a:r>
           </a:p>
           <a:p>
@@ -10891,7 +10891,7 @@
                 </a:solidFill>
                 <a:latin typeface="맑은 고딕"/>
               </a:rPr>
-              <a:t>• 협력사(아이시프트)의 myBeaker 연계 이슈 역시 수행사 PM/AA가 통합 취합하여 발주사 기술 PM과 일괄 협의</a:t>
+              <a:t>• 협력사(데이터브릿지)의 ProductLab 연계 이슈 역시 수행사 PM/AA가 통합 취합하여 발주사 기술 PM과 일괄 협의</a:t>
             </a:r>
           </a:p>
         </p:txBody>
@@ -11115,7 +11115,7 @@
                 </a:solidFill>
                 <a:latin typeface="맑은 고딕"/>
               </a:rPr>
-              <a:t>• 매주 금요일 13:30 주간정례보고(GRV_MAN_010) 및 매월 말 월간투입공수·진도보고(GRV_MAN_050)를 무결점 정례화</a:t>
+              <a:t>• 매주 금요일 13:30 주간정례보고(EMP_MAN_010) 및 매월 말 월간투입공수·진도보고(EMP_MAN_050)를 무결점 정례화</a:t>
             </a:r>
           </a:p>
           <a:p>
@@ -11377,7 +11377,7 @@
                 </a:solidFill>
                 <a:latin typeface="맑은 고딕"/>
               </a:rPr>
-              <a:t>• 모든 공식 회의 및 실무 협의는 종료 후 24시간 이내에 회의록(GRV_MAN_020)을 작성하여 참석자 전원 회람·확정</a:t>
+              <a:t>• 모든 공식 회의 및 실무 협의는 종료 후 24시간 이내에 회의록(EMP_MAN_020)을 작성하여 참석자 전원 회람·확정</a:t>
             </a:r>
           </a:p>
           <a:p>
@@ -11639,7 +11639,7 @@
                 </a:solidFill>
                 <a:latin typeface="맑은 고딕"/>
               </a:rPr>
-              <a:t>• 인프라 방화벽 개통 지연, SSO/Tiumnet 연계 사양 미확정 등 외부 의존성 병목은 발생 즉시 주간보고 '협조요청'에 적시</a:t>
+              <a:t>• 인프라 방화벽 개통 지연, SSO/MarketingHub 연계 사양 미확정 등 외부 의존성 병목은 발생 즉시 주간보고 '협조요청'에 적시</a:t>
             </a:r>
           </a:p>
           <a:p>
@@ -11909,7 +11909,7 @@
                 </a:solidFill>
                 <a:latin typeface="맑은 고딕"/>
               </a:rPr>
-              <a:t>산출물 ID : GRV_MAN_080  |  버전 : v1.0</a:t>
+              <a:t>산출물 ID : EMP_MAN_080  |  버전 : v1.0</a:t>
             </a:r>
           </a:p>
         </p:txBody>
@@ -11993,7 +11993,7 @@
                 </a:solidFill>
                 <a:latin typeface="맑은 고딕"/>
               </a:rPr>
-              <a:t>사업 총괄 의사결정 기구부터 현업(RA Lab)·기술(ERP플랫폼)·실증DB(아이시프트) 실무 협의체까지 유기적 소통 체계를 운영합니다.</a:t>
+              <a:t>사업 총괄 의사결정 기구부터 현업(RA Lab)·기술(ERP플랫폼)·실증DB(데이터브릿지) 실무 협의체까지 유기적 소통 체계를 운영합니다.</a:t>
             </a:r>
           </a:p>
         </p:txBody>
@@ -12121,7 +12121,7 @@
                 </a:solidFill>
                 <a:latin typeface="맑은 고딕"/>
               </a:rPr>
-              <a:t>아모레퍼시픽 Claimworks-Claims AI 시스템 구축  |  보고체계 관리 계획서</a:t>
+              <a:t>한빛글로벌 SyncGuard AI 시스템 구축  |  보고체계 관리 계획서</a:t>
             </a:r>
           </a:p>
         </p:txBody>
@@ -12205,7 +12205,7 @@
                 </a:solidFill>
                 <a:latin typeface="맑은 고딕"/>
               </a:rPr>
-              <a:t>발주사 : AMOREPACIFIC   |   수행사 : ㈜그로브소프트 (GROVE)</a:t>
+              <a:t>발주사 : HANBIT GLOBAL   |   수행사 : ㈜엠파시 (Empasy Inc.)</a:t>
             </a:r>
           </a:p>
         </p:txBody>
@@ -12387,7 +12387,7 @@
                 </a:solidFill>
                 <a:latin typeface="맑은 고딕"/>
               </a:rPr>
-              <a:t>발주사 : ㈜아모레퍼시픽</a:t>
+              <a:t>발주사 : ㈜한빛글로벌</a:t>
             </a:r>
           </a:p>
         </p:txBody>
@@ -12448,7 +12448,7 @@
                 </a:solidFill>
                 <a:latin typeface="맑은 고딕"/>
               </a:rPr>
-              <a:t>• 현업 PM : 박주열 (연구전략Lab / 010-2726-6624)</a:t>
+              <a:t>• 현업 PM : 정민수 (연구전략Lab / 010-2726-6624)</a:t>
             </a:r>
           </a:p>
           <a:p>
@@ -12486,7 +12486,7 @@
                 </a:solidFill>
                 <a:latin typeface="맑은 고딕"/>
               </a:rPr>
-              <a:t>• 기술 PM : 김경호 (ERP플랫폼기획팀 / 010-5059-1607)</a:t>
+              <a:t>• 기술 PM : 한승우 (ERP플랫폼기획팀 / 010-5059-1607)</a:t>
             </a:r>
           </a:p>
           <a:p>
@@ -12505,7 +12505,7 @@
                 </a:solidFill>
                 <a:latin typeface="맑은 고딕"/>
               </a:rPr>
-              <a:t>  - AWS 클라우드 인프라, SSO/Tiumnet/보안 정책 총괄</a:t>
+              <a:t>  - AWS 클라우드 인프라, SSO/MarketingHub/보안 정책 총괄</a:t>
             </a:r>
           </a:p>
           <a:p>
@@ -12562,7 +12562,7 @@
                 </a:solidFill>
                 <a:latin typeface="맑은 고딕"/>
               </a:rPr>
-              <a:t>• 양서윤, 오혜주, 김다은, 장원희</a:t>
+              <a:t>• 최윤아, 윤서연, 배수빈, 송하늘</a:t>
             </a:r>
           </a:p>
           <a:p>
@@ -12581,7 +12581,7 @@
                 </a:solidFill>
                 <a:latin typeface="맑은 고딕"/>
               </a:rPr>
-              <a:t>  - 화장품 표시·광고 실증 및 클레임 검토 프로세스 정의</a:t>
+              <a:t>  - 제품 표시·광고 실증 및 클레임 검토 프로세스 정의</a:t>
             </a:r>
           </a:p>
           <a:p>
@@ -12676,7 +12676,7 @@
                 </a:solidFill>
                 <a:latin typeface="맑은 고딕"/>
               </a:rPr>
-              <a:t>• 정보보안팀(망분리/방화벽/CA-PAM), Tiumnet 운영팀</a:t>
+              <a:t>• 정보보안팀(망분리/방화벽/CA-PAM), MarketingHub 운영팀</a:t>
             </a:r>
           </a:p>
         </p:txBody>
@@ -12858,7 +12858,7 @@
                 </a:solidFill>
                 <a:latin typeface="맑은 고딕"/>
               </a:rPr>
-              <a:t>주관수행사 : ㈜그로브소프트</a:t>
+              <a:t>주관수행사 : ㈜엠파시</a:t>
             </a:r>
           </a:p>
         </p:txBody>
@@ -12919,7 +12919,7 @@
                 </a:solidFill>
                 <a:latin typeface="맑은 고딕"/>
               </a:rPr>
-              <a:t>• 사업총괄 / AA : 오병문 (010-6355-2046)</a:t>
+              <a:t>• 사업총괄 / AA : 박준혁 (010-6355-2046)</a:t>
             </a:r>
           </a:p>
           <a:p>
@@ -13014,7 +13014,7 @@
                 </a:solidFill>
                 <a:latin typeface="맑은 고딕"/>
               </a:rPr>
-              <a:t>• 수행 PM : 김재은 (010-8949-0762)</a:t>
+              <a:t>• 수행 PM : 김태윤 (010-8949-0762)</a:t>
             </a:r>
           </a:p>
           <a:p>
@@ -13052,7 +13052,7 @@
                 </a:solidFill>
                 <a:latin typeface="맑은 고딕"/>
               </a:rPr>
-              <a:t>• PMO / 품질관리 : 황자영 (010-8455-5162)</a:t>
+              <a:t>• PMO / 품질관리 : 이지훈 (010-8455-5162)</a:t>
             </a:r>
           </a:p>
           <a:p>
@@ -13128,7 +13128,7 @@
                 </a:solidFill>
                 <a:latin typeface="맑은 고딕"/>
               </a:rPr>
-              <a:t>• 개발리드 : 장지용 (010-8614-0516) 외 전담 엔지니어</a:t>
+              <a:t>• 개발리드 : 최현우 (010-8614-0516) 외 전담 엔지니어</a:t>
             </a:r>
           </a:p>
           <a:p>
@@ -13329,7 +13329,7 @@
                 </a:solidFill>
                 <a:latin typeface="맑은 고딕"/>
               </a:rPr>
-              <a:t>협력사 : ㈜아이시프트</a:t>
+              <a:t>협력사 : ㈜데이터브릿지</a:t>
             </a:r>
           </a:p>
         </p:txBody>
@@ -13371,7 +13371,7 @@
                 </a:solidFill>
                 <a:latin typeface="맑은 고딕"/>
               </a:rPr>
-              <a:t>■ myBeaker 실증자료 DB 구축 및 연계 전담</a:t>
+              <a:t>■ ProductLab 실증자료 DB 구축 및 연계 전담</a:t>
             </a:r>
           </a:p>
           <a:p>
@@ -13390,7 +13390,7 @@
                 </a:solidFill>
                 <a:latin typeface="맑은 고딕"/>
               </a:rPr>
-              <a:t>• 협력사 총괄 : 진경민 상무 (010-9004-0638)</a:t>
+              <a:t>• 협력사 총괄 : 조성민 상무 (010-9004-0638)</a:t>
             </a:r>
           </a:p>
           <a:p>
@@ -13409,7 +13409,7 @@
                 </a:solidFill>
                 <a:latin typeface="맑은 고딕"/>
               </a:rPr>
-              <a:t>  - 연구원 myBeaker 시스템 데이터 구조 분석 및 일정 관리</a:t>
+              <a:t>  - 연구원 ProductLab 시스템 데이터 구조 분석 및 일정 관리</a:t>
             </a:r>
           </a:p>
           <a:p>
@@ -13428,7 +13428,7 @@
                 </a:solidFill>
                 <a:latin typeface="맑은 고딕"/>
               </a:rPr>
-              <a:t>• 기술 수석 : 남석현 수석 (010-9910-5715)</a:t>
+              <a:t>• 기술 수석 : 강동현 수석 (010-9910-5715)</a:t>
             </a:r>
           </a:p>
           <a:p>
@@ -13466,7 +13466,7 @@
                 </a:solidFill>
                 <a:latin typeface="맑은 고딕"/>
               </a:rPr>
-              <a:t>  - Claims AI ↔ myBeaker 간 REST API / 배치 연동 개발</a:t>
+              <a:t>  - SyncGuard AI ↔ ProductLab 간 REST API / 배치 연동 개발</a:t>
             </a:r>
           </a:p>
           <a:p>
@@ -13523,7 +13523,7 @@
                 </a:solidFill>
                 <a:latin typeface="맑은 고딕"/>
               </a:rPr>
-              <a:t>• 주관사 개발리드(장지용)·AA(오병문)와 주 2회 기술 동기화</a:t>
+              <a:t>• 주관사 개발리드(최현우)·AA(박준혁)와 주 2회 기술 동기화</a:t>
             </a:r>
           </a:p>
           <a:p>
@@ -13561,7 +13561,7 @@
                 </a:solidFill>
                 <a:latin typeface="맑은 고딕"/>
               </a:rPr>
-              <a:t>• myBeaker 연계 협의 회의 시 발주사 기술원/ERP팀과 합동 참석</a:t>
+              <a:t>• ProductLab 연계 협의 회의 시 발주사 기술원/ERP팀과 합동 참석</a:t>
             </a:r>
           </a:p>
         </p:txBody>
@@ -13691,7 +13691,7 @@
                 </a:solidFill>
                 <a:latin typeface="맑은 고딕"/>
               </a:rPr>
-              <a:t>소통 프로토콜 : [정기 보고] 수행 PM(김재은) ➔ 발주사 PM(박주열·김경호)  |  [기술/아키텍처 협의] 총괄 AA(오병문)·개발리드(장지용) ↔ 기술 PM(김경호)</a:t>
+              <a:t>소통 프로토콜 : [정기 보고] 수행 PM(김태윤) ➔ 발주사 PM(정민수·한승우)  |  [기술/아키텍처 협의] 총괄 AA(박준혁)·개발리드(최현우) ↔ 기술 PM(한승우)</a:t>
             </a:r>
           </a:p>
         </p:txBody>
@@ -13793,7 +13793,7 @@
                 </a:solidFill>
                 <a:latin typeface="맑은 고딕"/>
               </a:rPr>
-              <a:t>산출물 ID : GRV_MAN_080  |  버전 : v1.0</a:t>
+              <a:t>산출물 ID : EMP_MAN_080  |  버전 : v1.0</a:t>
             </a:r>
           </a:p>
         </p:txBody>
@@ -14005,7 +14005,7 @@
                 </a:solidFill>
                 <a:latin typeface="맑은 고딕"/>
               </a:rPr>
-              <a:t>아모레퍼시픽 Claimworks-Claims AI 시스템 구축  |  보고체계 관리 계획서</a:t>
+              <a:t>한빛글로벌 SyncGuard AI 시스템 구축  |  보고체계 관리 계획서</a:t>
             </a:r>
           </a:p>
         </p:txBody>
@@ -14089,7 +14089,7 @@
                 </a:solidFill>
                 <a:latin typeface="맑은 고딕"/>
               </a:rPr>
-              <a:t>발주사 : AMOREPACIFIC   |   수행사 : ㈜그로브소프트 (GROVE)</a:t>
+              <a:t>발주사 : HANBIT GLOBAL   |   수행사 : ㈜엠파시 (Empasy Inc.)</a:t>
             </a:r>
           </a:p>
         </p:txBody>
@@ -14996,7 +14996,7 @@
                           </a:solidFill>
                           <a:latin typeface="맑은 고딕"/>
                         </a:rPr>
-                        <a:t>수행 PM (김재은)</a:t>
+                        <a:t>수행 PM (김태윤)</a:t>
                       </a:r>
                     </a:p>
                   </a:txBody>
@@ -15096,7 +15096,7 @@
                           </a:solidFill>
                           <a:latin typeface="맑은 고딕"/>
                         </a:rPr>
-                        <a:t>GRV_MAN_010 / 020</a:t>
+                        <a:t>EMP_MAN_010 / 020</a:t>
                       </a:r>
                     </a:p>
                   </a:txBody>
@@ -15448,7 +15448,7 @@
                           </a:solidFill>
                           <a:latin typeface="맑은 고딕"/>
                         </a:rPr>
-                        <a:t>GRV_MAN_050 / WBS</a:t>
+                        <a:t>EMP_MAN_050 / WBS</a:t>
                       </a:r>
                     </a:p>
                   </a:txBody>
@@ -15800,7 +15800,7 @@
                           </a:solidFill>
                           <a:latin typeface="맑은 고딕"/>
                         </a:rPr>
-                        <a:t>GRV_INT_000 / 010</a:t>
+                        <a:t>EMP_INT_000 / 010</a:t>
                       </a:r>
                     </a:p>
                   </a:txBody>
@@ -16152,7 +16152,7 @@
                           </a:solidFill>
                           <a:latin typeface="맑은 고딕"/>
                         </a:rPr>
-                        <a:t>GRV_ANL/DEG 전종</a:t>
+                        <a:t>EMP_ANL/DEG 전종</a:t>
                       </a:r>
                     </a:p>
                   </a:txBody>
@@ -16454,7 +16454,7 @@
                           </a:solidFill>
                           <a:latin typeface="맑은 고딕"/>
                         </a:rPr>
-                        <a:t>발주사 PM, RA Lab, 아이시프트</a:t>
+                        <a:t>발주사 PM, RA Lab, 데이터브릿지</a:t>
                       </a:r>
                     </a:p>
                   </a:txBody>
@@ -16504,7 +16504,7 @@
                           </a:solidFill>
                           <a:latin typeface="맑은 고딕"/>
                         </a:rPr>
-                        <a:t>GRV_EXE_010~030</a:t>
+                        <a:t>EMP_EXE_010~030</a:t>
                       </a:r>
                     </a:p>
                   </a:txBody>
@@ -16554,7 +16554,7 @@
                           </a:solidFill>
                           <a:latin typeface="맑은 고딕"/>
                         </a:rPr>
-                        <a:t>3단계 AI 판정 엔진 프로토타입 시연, 100대 규칙사전 및 myBeaker 실증DB 연동 검증</a:t>
+                        <a:t>3단계 AI 판정 엔진 프로토타입 시연, 100대 규칙사전 및 ProductLab 실증DB 연동 검증</a:t>
                       </a:r>
                     </a:p>
                   </a:txBody>
@@ -16856,7 +16856,7 @@
                           </a:solidFill>
                           <a:latin typeface="맑은 고딕"/>
                         </a:rPr>
-                        <a:t>GRV_TST_010~050</a:t>
+                        <a:t>EMP_TST_010~050</a:t>
                       </a:r>
                     </a:p>
                   </a:txBody>
@@ -17208,7 +17208,7 @@
                           </a:solidFill>
                           <a:latin typeface="맑은 고딕"/>
                         </a:rPr>
-                        <a:t>GRV_IMP_010~090</a:t>
+                        <a:t>EMP_IMP_010~090</a:t>
                       </a:r>
                     </a:p>
                   </a:txBody>
@@ -17560,7 +17560,7 @@
                           </a:solidFill>
                           <a:latin typeface="맑은 고딕"/>
                         </a:rPr>
-                        <a:t>GRV_MAN_030 / 060</a:t>
+                        <a:t>EMP_MAN_030 / 060</a:t>
                       </a:r>
                     </a:p>
                   </a:txBody>
@@ -17742,7 +17742,7 @@
                 </a:solidFill>
                 <a:latin typeface="맑은 고딕"/>
               </a:rPr>
-              <a:t>산출물 ID : GRV_MAN_080  |  버전 : v1.0</a:t>
+              <a:t>산출물 ID : EMP_MAN_080  |  버전 : v1.0</a:t>
             </a:r>
           </a:p>
         </p:txBody>
@@ -17954,7 +17954,7 @@
                 </a:solidFill>
                 <a:latin typeface="맑은 고딕"/>
               </a:rPr>
-              <a:t>아모레퍼시픽 Claimworks-Claims AI 시스템 구축  |  보고체계 관리 계획서</a:t>
+              <a:t>한빛글로벌 SyncGuard AI 시스템 구축  |  보고체계 관리 계획서</a:t>
             </a:r>
           </a:p>
         </p:txBody>
@@ -18038,7 +18038,7 @@
                 </a:solidFill>
                 <a:latin typeface="맑은 고딕"/>
               </a:rPr>
-              <a:t>발주사 : AMOREPACIFIC   |   수행사 : ㈜그로브소프트 (GROVE)</a:t>
+              <a:t>발주사 : HANBIT GLOBAL   |   수행사 : ㈜엠파시 (Empasy Inc.)</a:t>
             </a:r>
           </a:p>
         </p:txBody>
@@ -18511,7 +18511,7 @@
                           </a:solidFill>
                           <a:latin typeface="맑은 고딕"/>
                         </a:rPr>
-                        <a:t>(아모레 본사 / 온라인)</a:t>
+                        <a:t>(한빛글로벌 본사 / 온라인)</a:t>
                       </a:r>
                     </a:p>
                   </a:txBody>
@@ -18561,7 +18561,7 @@
                           </a:solidFill>
                           <a:latin typeface="맑은 고딕"/>
                         </a:rPr>
-                        <a:t>발주사 PM(박주열·김경호),</a:t>
+                        <a:t>발주사 PM(정민수·한승우),</a:t>
                       </a:r>
                     </a:p>
                     <a:p>
@@ -18580,7 +18580,7 @@
                           </a:solidFill>
                           <a:latin typeface="맑은 고딕"/>
                         </a:rPr>
-                        <a:t>수행 PM(김재은), AA(오병문), PMO</a:t>
+                        <a:t>수행 PM(김태윤), AA(박준혁), PMO</a:t>
                       </a:r>
                     </a:p>
                   </a:txBody>
@@ -18908,7 +18908,7 @@
                           </a:solidFill>
                           <a:latin typeface="맑은 고딕"/>
                         </a:rPr>
-                        <a:t>(아모레퍼시픽 회의실)</a:t>
+                        <a:t>(한빛글로벌 회의실)</a:t>
                       </a:r>
                     </a:p>
                   </a:txBody>
@@ -18958,7 +18958,7 @@
                           </a:solidFill>
                           <a:latin typeface="맑은 고딕"/>
                         </a:rPr>
-                        <a:t>현업 PM(박주열), RA Lab 4인,</a:t>
+                        <a:t>현업 PM(정민수), RA Lab 4인,</a:t>
                       </a:r>
                     </a:p>
                     <a:p>
@@ -19336,7 +19336,7 @@
                           </a:solidFill>
                           <a:latin typeface="맑은 고딕"/>
                         </a:rPr>
-                        <a:t>기술 PM(김경호), 아키텍처/보안팀,</a:t>
+                        <a:t>기술 PM(한승우), 아키텍처/보안팀,</a:t>
                       </a:r>
                     </a:p>
                     <a:p>
@@ -19355,7 +19355,7 @@
                           </a:solidFill>
                           <a:latin typeface="맑은 고딕"/>
                         </a:rPr>
-                        <a:t>총괄 AA(오병문), 개발리드, 남석현 수석</a:t>
+                        <a:t>총괄 AA(박준혁), 개발리드, 강동현 수석</a:t>
                       </a:r>
                     </a:p>
                   </a:txBody>
@@ -19424,7 +19424,7 @@
                           </a:solidFill>
                           <a:latin typeface="맑은 고딕"/>
                         </a:rPr>
-                        <a:t>• AP-ON SSO, Tiumnet, myBeaker API 규격 확정</a:t>
+                        <a:t>• HB-SSO SSO, MarketingHub, ProductLab API 규격 확정</a:t>
                       </a:r>
                     </a:p>
                   </a:txBody>
@@ -20975,7 +20975,7 @@
                 </a:solidFill>
                 <a:latin typeface="맑은 고딕"/>
               </a:rPr>
-              <a:t>산출물 ID : GRV_MAN_080  |  버전 : v1.0</a:t>
+              <a:t>산출물 ID : EMP_MAN_080  |  버전 : v1.0</a:t>
             </a:r>
           </a:p>
         </p:txBody>
@@ -21187,7 +21187,7 @@
                 </a:solidFill>
                 <a:latin typeface="맑은 고딕"/>
               </a:rPr>
-              <a:t>아모레퍼시픽 Claimworks-Claims AI 시스템 구축  |  보고체계 관리 계획서</a:t>
+              <a:t>한빛글로벌 SyncGuard AI 시스템 구축  |  보고체계 관리 계획서</a:t>
             </a:r>
           </a:p>
         </p:txBody>
@@ -21271,7 +21271,7 @@
                 </a:solidFill>
                 <a:latin typeface="맑은 고딕"/>
               </a:rPr>
-              <a:t>발주사 : AMOREPACIFIC   |   수행사 : ㈜그로브소프트 (GROVE)</a:t>
+              <a:t>발주사 : HANBIT GLOBAL   |   수행사 : ㈜엠파시 (Empasy Inc.)</a:t>
             </a:r>
           </a:p>
         </p:txBody>
@@ -21590,7 +21590,7 @@
                 </a:solidFill>
                 <a:latin typeface="맑은 고딕"/>
               </a:rPr>
-              <a:t>• 주관사 파트 리드(장지용 개발리드 등) ↔ 발주사 실무 담당자(RA Lab / IT 담당) 직접 협의</a:t>
+              <a:t>• 주관사 파트 리드(최현우 개발리드 등) ↔ 발주사 실무 담당자(RA Lab / IT 담당) 직접 협의</a:t>
             </a:r>
           </a:p>
           <a:p>
@@ -21609,7 +21609,7 @@
                 </a:solidFill>
                 <a:latin typeface="맑은 고딕"/>
               </a:rPr>
-              <a:t>• 수행 PM에게 일일 스크럼 시 현황 공유 및 이슈관리대장(GRV_MAN_030) '낮음(Low)' 등록</a:t>
+              <a:t>• 수행 PM에게 일일 스크럼 시 현황 공유 및 이슈관리대장(EMP_MAN_030) '낮음(Low)' 등록</a:t>
             </a:r>
           </a:p>
           <a:p>
@@ -21890,7 +21890,7 @@
                 </a:solidFill>
                 <a:latin typeface="맑은 고딕"/>
               </a:rPr>
-              <a:t>• 사내 방화벽 오픈 지연, SSO/Tiumnet/myBeaker 인터페이스 사양 미확정, AI 응답속도 저하 등</a:t>
+              <a:t>• 사내 방화벽 오픈 지연, SSO/MarketingHub/ProductLab 인터페이스 사양 미확정, AI 응답속도 저하 등</a:t>
             </a:r>
           </a:p>
           <a:p>
@@ -21947,7 +21947,7 @@
                 </a:solidFill>
                 <a:latin typeface="맑은 고딕"/>
               </a:rPr>
-              <a:t>• 수행 PM(김재은)·총괄 AA(오병문) ➔ 발주사 현업 PM(박주열)·기술 PM(김경호) 긴급 협의 소집</a:t>
+              <a:t>• 수행 PM(김태윤)·총괄 AA(박준혁) ➔ 발주사 현업 PM(정민수)·기술 PM(한승우) 긴급 협의 소집</a:t>
             </a:r>
           </a:p>
           <a:p>
@@ -22304,7 +22304,7 @@
                 </a:solidFill>
                 <a:latin typeface="맑은 고딕"/>
               </a:rPr>
-              <a:t>• 수행사 사업총괄(오병문) 및 대표단 ↔ 발주사 연구전략Lab/ERP플랫폼 부서장 공식 보고</a:t>
+              <a:t>• 수행사 사업총괄(박준혁) 및 대표단 ↔ 발주사 연구전략Lab/ERP플랫폼 부서장 공식 보고</a:t>
             </a:r>
           </a:p>
           <a:p>
@@ -22323,7 +22323,7 @@
                 </a:solidFill>
                 <a:latin typeface="맑은 고딕"/>
               </a:rPr>
-              <a:t>• 예비 인력 긴급 추가 투입, 단계별 범위 조정(Cut-off), 공식 변경관리대장(GRV_MAN_060) 의결</a:t>
+              <a:t>• 예비 인력 긴급 추가 투입, 단계별 범위 조정(Cut-off), 공식 변경관리대장(EMP_MAN_060) 의결</a:t>
             </a:r>
           </a:p>
         </p:txBody>
@@ -22453,7 +22453,7 @@
                 </a:solidFill>
                 <a:latin typeface="맑은 고딕"/>
               </a:rPr>
-              <a:t>에스컬레이션 골든룰 : 이슈 은폐로 인한 사후 지연 보고는 엄격히 금지하며, 모든 이슈는 이슈관리대장(GRV_MAN_030)에 등록 후 종결 시까지 추적합니다.</a:t>
+              <a:t>에스컬레이션 골든룰 : 이슈 은폐로 인한 사후 지연 보고는 엄격히 금지하며, 모든 이슈는 이슈관리대장(EMP_MAN_030)에 등록 후 종결 시까지 추적합니다.</a:t>
             </a:r>
           </a:p>
         </p:txBody>
@@ -22555,7 +22555,7 @@
                 </a:solidFill>
                 <a:latin typeface="맑은 고딕"/>
               </a:rPr>
-              <a:t>산출물 ID : GRV_MAN_080  |  버전 : v1.0</a:t>
+              <a:t>산출물 ID : EMP_MAN_080  |  버전 : v1.0</a:t>
             </a:r>
           </a:p>
         </p:txBody>
@@ -22767,7 +22767,7 @@
                 </a:solidFill>
                 <a:latin typeface="맑은 고딕"/>
               </a:rPr>
-              <a:t>아모레퍼시픽 Claimworks-Claims AI 시스템 구축  |  보고체계 관리 계획서</a:t>
+              <a:t>한빛글로벌 SyncGuard AI 시스템 구축  |  보고체계 관리 계획서</a:t>
             </a:r>
           </a:p>
         </p:txBody>
@@ -22851,7 +22851,7 @@
                 </a:solidFill>
                 <a:latin typeface="맑은 고딕"/>
               </a:rPr>
-              <a:t>발주사 : AMOREPACIFIC   |   수행사 : ㈜그로브소프트 (GROVE)</a:t>
+              <a:t>발주사 : HANBIT GLOBAL   |   수행사 : ㈜엠파시 (Empasy Inc.)</a:t>
             </a:r>
           </a:p>
         </p:txBody>
@@ -23173,7 +23173,7 @@
                           </a:solidFill>
                           <a:latin typeface="맑은 고딕"/>
                         </a:rPr>
-                        <a:t>(claim_ai 표준 폴더)</a:t>
+                        <a:t>(syncguard_ai 표준 폴더)</a:t>
                       </a:r>
                     </a:p>
                   </a:txBody>
@@ -23430,7 +23430,7 @@
                           </a:solidFill>
                           <a:latin typeface="맑은 고딕"/>
                         </a:rPr>
-                        <a:t>수행사 PMO (황자영)</a:t>
+                        <a:t>수행사 PMO (이지훈)</a:t>
                       </a:r>
                     </a:p>
                     <a:p>
@@ -23708,7 +23708,7 @@
                           </a:solidFill>
                           <a:latin typeface="맑은 고딕"/>
                         </a:rPr>
-                        <a:t>• 제목 말머리에 [Claims AI] 필수 표기</a:t>
+                        <a:t>• 제목 말머리에 [SyncGuard AI] 필수 표기</a:t>
                       </a:r>
                     </a:p>
                     <a:p>
@@ -23777,7 +23777,7 @@
                           </a:solidFill>
                           <a:latin typeface="맑은 고딕"/>
                         </a:rPr>
-                        <a:t>수행 PM (김재은)</a:t>
+                        <a:t>수행 PM (김태윤)</a:t>
                       </a:r>
                     </a:p>
                     <a:p>
@@ -24433,7 +24433,7 @@
                           </a:solidFill>
                           <a:latin typeface="맑은 고딕"/>
                         </a:rPr>
-                        <a:t>수행사 PMO (황자영)</a:t>
+                        <a:t>수행사 PMO (이지훈)</a:t>
                       </a:r>
                     </a:p>
                   </a:txBody>
@@ -24504,7 +24504,7 @@
                           </a:solidFill>
                           <a:latin typeface="맑은 고딕"/>
                         </a:rPr>
-                        <a:t>(AP-ON / 인프라 신청)</a:t>
+                        <a:t>(HB-SSO / 인프라 신청)</a:t>
                       </a:r>
                     </a:p>
                   </a:txBody>
@@ -24554,7 +24554,7 @@
                           </a:solidFill>
                           <a:latin typeface="맑은 고딕"/>
                         </a:rPr>
-                        <a:t>• 사내 계정(AP-ON), VPC, CA-PAM, Chakra DB 권한 신청</a:t>
+                        <a:t>• 사내 계정(HB-SSO), VPC, CA-PAM, Chakra DB 권한 신청</a:t>
                       </a:r>
                     </a:p>
                     <a:p>
@@ -24573,7 +24573,7 @@
                           </a:solidFill>
                           <a:latin typeface="맑은 고딕"/>
                         </a:rPr>
-                        <a:t>• 내부 ALB 및 타 시스템(Tiumnet/myBeaker) 방화벽 개통</a:t>
+                        <a:t>• 내부 ALB 및 타 시스템(MarketingHub/ProductLab) 방화벽 개통</a:t>
                       </a:r>
                     </a:p>
                   </a:txBody>
@@ -24642,7 +24642,7 @@
                           </a:solidFill>
                           <a:latin typeface="맑은 고딕"/>
                         </a:rPr>
-                        <a:t>기술 PM(김경호) 승인</a:t>
+                        <a:t>기술 PM(한승우) 승인</a:t>
                       </a:r>
                     </a:p>
                   </a:txBody>
@@ -24761,7 +24761,7 @@
                           </a:solidFill>
                           <a:latin typeface="맑은 고딕"/>
                         </a:rPr>
-                        <a:t>기술 PM (김경호)</a:t>
+                        <a:t>기술 PM (한승우)</a:t>
                       </a:r>
                     </a:p>
                     <a:p>
@@ -24780,7 +24780,7 @@
                           </a:solidFill>
                           <a:latin typeface="맑은 고딕"/>
                         </a:rPr>
-                        <a:t>총괄 AA (오병문)</a:t>
+                        <a:t>총괄 AA (박준혁)</a:t>
                       </a:r>
                     </a:p>
                   </a:txBody>
@@ -24940,7 +24940,7 @@
                 </a:solidFill>
                 <a:latin typeface="맑은 고딕"/>
               </a:rPr>
-              <a:t>주의사항 : 메신저나 구두로 논의된 기술 사양 변경은 공식 효력이 없으며, 반드시 회의록(GRV_MAN_020) 또는 산출물 개정본에 반영되어야 최종 확정됩니다.</a:t>
+              <a:t>주의사항 : 메신저나 구두로 논의된 기술 사양 변경은 공식 효력이 없으며, 반드시 회의록(EMP_MAN_020) 또는 산출물 개정본에 반영되어야 최종 확정됩니다.</a:t>
             </a:r>
           </a:p>
         </p:txBody>
@@ -25042,7 +25042,7 @@
                 </a:solidFill>
                 <a:latin typeface="맑은 고딕"/>
               </a:rPr>
-              <a:t>산출물 ID : GRV_MAN_080  |  버전 : v1.0</a:t>
+              <a:t>산출물 ID : EMP_MAN_080  |  버전 : v1.0</a:t>
             </a:r>
           </a:p>
         </p:txBody>
@@ -25126,7 +25126,7 @@
                 </a:solidFill>
                 <a:latin typeface="맑은 고딕"/>
               </a:rPr>
-              <a:t>프로젝트 연락처 대장(Claimworks-Claims AI_프로젝트_연락처.xlsx)에 등재된 발주사·주관사·협력사 핵심 인력 현황입니다.</a:t>
+              <a:t>프로젝트 연락처 대장(SyncGuard AI_프로젝트_연락처.xlsx)에 등재된 발주사·주관사·협력사 핵심 인력 현황입니다.</a:t>
             </a:r>
           </a:p>
         </p:txBody>
@@ -25254,7 +25254,7 @@
                 </a:solidFill>
                 <a:latin typeface="맑은 고딕"/>
               </a:rPr>
-              <a:t>아모레퍼시픽 Claimworks-Claims AI 시스템 구축  |  보고체계 관리 계획서</a:t>
+              <a:t>한빛글로벌 SyncGuard AI 시스템 구축  |  보고체계 관리 계획서</a:t>
             </a:r>
           </a:p>
         </p:txBody>
@@ -25338,7 +25338,7 @@
                 </a:solidFill>
                 <a:latin typeface="맑은 고딕"/>
               </a:rPr>
-              <a:t>발주사 : AMOREPACIFIC   |   수행사 : ㈜그로브소프트 (GROVE)</a:t>
+              <a:t>발주사 : HANBIT GLOBAL   |   수행사 : ㈜엠파시 (Empasy Inc.)</a:t>
             </a:r>
           </a:p>
         </p:txBody>
@@ -25793,7 +25793,7 @@
                           </a:solidFill>
                           <a:latin typeface="맑은 고딕"/>
                         </a:rPr>
-                        <a:t>아모레퍼시픽 / 연구전략Lab</a:t>
+                        <a:t>한빛글로벌 / 연구전략Lab</a:t>
                       </a:r>
                     </a:p>
                   </a:txBody>
@@ -25843,7 +25843,7 @@
                           </a:solidFill>
                           <a:latin typeface="맑은 고딕"/>
                         </a:rPr>
-                        <a:t>박주열</a:t>
+                        <a:t>정민수</a:t>
                       </a:r>
                     </a:p>
                   </a:txBody>
@@ -25993,7 +25993,7 @@
                           </a:solidFill>
                           <a:latin typeface="맑은 고딕"/>
                         </a:rPr>
-                        <a:t>jypark@amorepacific.com</a:t>
+                        <a:t>jypark@hanbitglobal.com</a:t>
                       </a:r>
                     </a:p>
                   </a:txBody>
@@ -26145,7 +26145,7 @@
                           </a:solidFill>
                           <a:latin typeface="맑은 고딕"/>
                         </a:rPr>
-                        <a:t>아모레퍼시픽 / ERP플랫폼기획팀</a:t>
+                        <a:t>한빛글로벌 / ERP플랫폼기획팀</a:t>
                       </a:r>
                     </a:p>
                   </a:txBody>
@@ -26195,7 +26195,7 @@
                           </a:solidFill>
                           <a:latin typeface="맑은 고딕"/>
                         </a:rPr>
-                        <a:t>김경호</a:t>
+                        <a:t>한승우</a:t>
                       </a:r>
                     </a:p>
                   </a:txBody>
@@ -26345,7 +26345,7 @@
                           </a:solidFill>
                           <a:latin typeface="맑은 고딕"/>
                         </a:rPr>
-                        <a:t>khkim@amorepacific.com</a:t>
+                        <a:t>khkim@hanbitglobal.com</a:t>
                       </a:r>
                     </a:p>
                   </a:txBody>
@@ -26395,7 +26395,7 @@
                           </a:solidFill>
                           <a:latin typeface="맑은 고딕"/>
                         </a:rPr>
-                        <a:t>AWS 클라우드 인프라, 보안/방화벽, 사내 시스템(SSO/Tiumnet) 연계 총괄</a:t>
+                        <a:t>AWS 클라우드 인프라, 보안/방화벽, 사내 시스템(SSO/MarketingHub) 연계 총괄</a:t>
                       </a:r>
                     </a:p>
                   </a:txBody>
@@ -26497,7 +26497,7 @@
                           </a:solidFill>
                           <a:latin typeface="맑은 고딕"/>
                         </a:rPr>
-                        <a:t>아모레퍼시픽 / RA Lab</a:t>
+                        <a:t>한빛글로벌 / RA Lab</a:t>
                       </a:r>
                     </a:p>
                   </a:txBody>
@@ -26547,7 +26547,7 @@
                           </a:solidFill>
                           <a:latin typeface="맑은 고딕"/>
                         </a:rPr>
-                        <a:t>양서윤</a:t>
+                        <a:t>최윤아</a:t>
                       </a:r>
                     </a:p>
                   </a:txBody>
@@ -26697,7 +26697,7 @@
                           </a:solidFill>
                           <a:latin typeface="맑은 고딕"/>
                         </a:rPr>
-                        <a:t>sy.yang@amorepacific.com</a:t>
+                        <a:t>sy.yang@hanbitglobal.com</a:t>
                       </a:r>
                     </a:p>
                   </a:txBody>
@@ -26747,7 +26747,7 @@
                           </a:solidFill>
                           <a:latin typeface="맑은 고딕"/>
                         </a:rPr>
-                        <a:t>화장품 표시·광고 클레임 검토 기준 정의, 규칙사전 및 골든셋 검증</a:t>
+                        <a:t>제품 표시·광고 클레임 검토 기준 정의, 규칙사전 및 골든셋 검증</a:t>
                       </a:r>
                     </a:p>
                   </a:txBody>
@@ -26849,7 +26849,7 @@
                           </a:solidFill>
                           <a:latin typeface="맑은 고딕"/>
                         </a:rPr>
-                        <a:t>아모레퍼시픽 / RA Lab</a:t>
+                        <a:t>한빛글로벌 / RA Lab</a:t>
                       </a:r>
                     </a:p>
                   </a:txBody>
@@ -26899,7 +26899,7 @@
                           </a:solidFill>
                           <a:latin typeface="맑은 고딕"/>
                         </a:rPr>
-                        <a:t>오혜주</a:t>
+                        <a:t>윤서연</a:t>
                       </a:r>
                     </a:p>
                   </a:txBody>
@@ -27049,7 +27049,7 @@
                           </a:solidFill>
                           <a:latin typeface="맑은 고딕"/>
                         </a:rPr>
-                        <a:t>hj.oh@amorepacific.com</a:t>
+                        <a:t>hj.oh@hanbitglobal.com</a:t>
                       </a:r>
                     </a:p>
                   </a:txBody>
@@ -27201,7 +27201,7 @@
                           </a:solidFill>
                           <a:latin typeface="맑은 고딕"/>
                         </a:rPr>
-                        <a:t>아모레퍼시픽 / RA Lab</a:t>
+                        <a:t>한빛글로벌 / RA Lab</a:t>
                       </a:r>
                     </a:p>
                   </a:txBody>
@@ -27251,7 +27251,7 @@
                           </a:solidFill>
                           <a:latin typeface="맑은 고딕"/>
                         </a:rPr>
-                        <a:t>김다은 / 장원희</a:t>
+                        <a:t>배수빈 / 송하늘</a:t>
                       </a:r>
                     </a:p>
                   </a:txBody>
@@ -27401,7 +27401,7 @@
                           </a:solidFill>
                           <a:latin typeface="맑은 고딕"/>
                         </a:rPr>
-                        <a:t>de.kim / wh.jang@amorepacific.com</a:t>
+                        <a:t>de.kim / wh.jang@hanbitglobal.com</a:t>
                       </a:r>
                     </a:p>
                   </a:txBody>
@@ -27553,7 +27553,7 @@
                           </a:solidFill>
                           <a:latin typeface="맑은 고딕"/>
                         </a:rPr>
-                        <a:t>㈜그로브소프트 (GROVE)</a:t>
+                        <a:t>㈜엠파시 (Empasy Inc.)</a:t>
                       </a:r>
                     </a:p>
                   </a:txBody>
@@ -27603,7 +27603,7 @@
                           </a:solidFill>
                           <a:latin typeface="맑은 고딕"/>
                         </a:rPr>
-                        <a:t>오병문</a:t>
+                        <a:t>박준혁</a:t>
                       </a:r>
                     </a:p>
                   </a:txBody>
@@ -27753,7 +27753,7 @@
                           </a:solidFill>
                           <a:latin typeface="맑은 고딕"/>
                         </a:rPr>
-                        <a:t>bmoh@grovesoft.co.kr</a:t>
+                        <a:t>bmoh@empasy.co.kr</a:t>
                       </a:r>
                     </a:p>
                   </a:txBody>
@@ -27905,7 +27905,7 @@
                           </a:solidFill>
                           <a:latin typeface="맑은 고딕"/>
                         </a:rPr>
-                        <a:t>㈜그로브소프트 (GROVE)</a:t>
+                        <a:t>㈜엠파시 (Empasy Inc.)</a:t>
                       </a:r>
                     </a:p>
                   </a:txBody>
@@ -27955,7 +27955,7 @@
                           </a:solidFill>
                           <a:latin typeface="맑은 고딕"/>
                         </a:rPr>
-                        <a:t>김재은</a:t>
+                        <a:t>김태윤</a:t>
                       </a:r>
                     </a:p>
                   </a:txBody>
@@ -28105,7 +28105,7 @@
                           </a:solidFill>
                           <a:latin typeface="맑은 고딕"/>
                         </a:rPr>
-                        <a:t>jekim@grovesoft.co.kr</a:t>
+                        <a:t>jekim@empasy.co.kr</a:t>
                       </a:r>
                     </a:p>
                   </a:txBody>
@@ -28257,7 +28257,7 @@
                           </a:solidFill>
                           <a:latin typeface="맑은 고딕"/>
                         </a:rPr>
-                        <a:t>㈜그로브소프트 (GROVE)</a:t>
+                        <a:t>㈜엠파시 (Empasy Inc.)</a:t>
                       </a:r>
                     </a:p>
                   </a:txBody>
@@ -28307,7 +28307,7 @@
                           </a:solidFill>
                           <a:latin typeface="맑은 고딕"/>
                         </a:rPr>
-                        <a:t>황자영</a:t>
+                        <a:t>이지훈</a:t>
                       </a:r>
                     </a:p>
                   </a:txBody>
@@ -28457,7 +28457,7 @@
                           </a:solidFill>
                           <a:latin typeface="맑은 고딕"/>
                         </a:rPr>
-                        <a:t>jyhwang@grovesoft.co.kr</a:t>
+                        <a:t>jyhwang@empasy.co.kr</a:t>
                       </a:r>
                     </a:p>
                   </a:txBody>
@@ -28609,7 +28609,7 @@
                           </a:solidFill>
                           <a:latin typeface="맑은 고딕"/>
                         </a:rPr>
-                        <a:t>㈜그로브소프트 (GROVE)</a:t>
+                        <a:t>㈜엠파시 (Empasy Inc.)</a:t>
                       </a:r>
                     </a:p>
                   </a:txBody>
@@ -28659,7 +28659,7 @@
                           </a:solidFill>
                           <a:latin typeface="맑은 고딕"/>
                         </a:rPr>
-                        <a:t>장지용</a:t>
+                        <a:t>최현우</a:t>
                       </a:r>
                     </a:p>
                   </a:txBody>
@@ -28809,7 +28809,7 @@
                           </a:solidFill>
                           <a:latin typeface="맑은 고딕"/>
                         </a:rPr>
-                        <a:t>jyjang@grovesoft.co.kr</a:t>
+                        <a:t>jyjang@empasy.co.kr</a:t>
                       </a:r>
                     </a:p>
                   </a:txBody>
@@ -28961,7 +28961,7 @@
                           </a:solidFill>
                           <a:latin typeface="맑은 고딕"/>
                         </a:rPr>
-                        <a:t>㈜아이시프트 (iSHIFT)</a:t>
+                        <a:t>㈜데이터브릿지 (데이터브릿지(DataBridge))</a:t>
                       </a:r>
                     </a:p>
                   </a:txBody>
@@ -29011,7 +29011,7 @@
                           </a:solidFill>
                           <a:latin typeface="맑은 고딕"/>
                         </a:rPr>
-                        <a:t>진경민 / 남석현</a:t>
+                        <a:t>조성민 / 강동현</a:t>
                       </a:r>
                     </a:p>
                   </a:txBody>
@@ -29180,7 +29180,7 @@
                           </a:solidFill>
                           <a:latin typeface="맑은 고딕"/>
                         </a:rPr>
-                        <a:t>kmjin@ishift.co.kr</a:t>
+                        <a:t>kmjin@databridge.co.kr</a:t>
                       </a:r>
                     </a:p>
                     <a:p>
@@ -29199,7 +29199,7 @@
                           </a:solidFill>
                           <a:latin typeface="맑은 고딕"/>
                         </a:rPr>
-                        <a:t>shnam@ishift.co.kr</a:t>
+                        <a:t>shnam@databridge.co.kr</a:t>
                       </a:r>
                     </a:p>
                   </a:txBody>
@@ -29249,7 +29249,7 @@
                           </a:solidFill>
                           <a:latin typeface="맑은 고딕"/>
                         </a:rPr>
-                        <a:t>연구원 myBeaker 실증자료 DB 구축, 원료/효능/임상 데이터 연계 API 개발</a:t>
+                        <a:t>연구원 ProductLab 실증자료 DB 구축, 원료/효능/임상 데이터 연계 API 개발</a:t>
                       </a:r>
                     </a:p>
                   </a:txBody>

--- a/public/templates/000_pm_suite/01_프로젝트 관리/01_통합관리/보고체계_관리_계획서_템플릿.pptx
+++ b/public/templates/000_pm_suite/01_프로젝트 관리/01_통합관리/보고체계_관리_계획서_템플릿.pptx
@@ -3350,7 +3350,7 @@
                 </a:solidFill>
                 <a:latin typeface="맑은 고딕"/>
               </a:rPr>
-              <a:t>한빛글로벌 SyncGuard AI 시스템 구축</a:t>
+              <a:t>한빛글로벌 SyncFlow AI 시스템 구축</a:t>
             </a:r>
           </a:p>
         </p:txBody>
@@ -3534,22 +3534,22 @@
                     </a:solidFill>
                     <a:lnL w="6350" cmpd="sng">
                       <a:solidFill>
-                        <a:srgbClr val="334155"/>
+                        <a:srgbClr val="1E3A5F"/>
                       </a:solidFill>
                     </a:lnL>
                     <a:lnR w="6350" cmpd="sng">
                       <a:solidFill>
-                        <a:srgbClr val="334155"/>
+                        <a:srgbClr val="1E3A5F"/>
                       </a:solidFill>
                     </a:lnR>
                     <a:lnT w="6350" cmpd="sng">
                       <a:solidFill>
-                        <a:srgbClr val="334155"/>
+                        <a:srgbClr val="1E3A5F"/>
                       </a:solidFill>
                     </a:lnT>
                     <a:lnB w="6350" cmpd="sng">
                       <a:solidFill>
-                        <a:srgbClr val="334155"/>
+                        <a:srgbClr val="1E3A5F"/>
                       </a:solidFill>
                     </a:lnB>
                   </a:tcPr>
@@ -3574,7 +3574,7 @@
                           </a:solidFill>
                           <a:latin typeface="맑은 고딕"/>
                         </a:rPr>
-                        <a:t>한빛글로벌 SyncGuard AI 시스템 구축 용역</a:t>
+                        <a:t>한빛글로벌 SyncFlow AI 시스템 구축 용역</a:t>
                       </a:r>
                     </a:p>
                   </a:txBody>
@@ -3584,22 +3584,22 @@
                     </a:solidFill>
                     <a:lnL w="6350" cmpd="sng">
                       <a:solidFill>
-                        <a:srgbClr val="334155"/>
+                        <a:srgbClr val="1E3A5F"/>
                       </a:solidFill>
                     </a:lnL>
                     <a:lnR w="6350" cmpd="sng">
                       <a:solidFill>
-                        <a:srgbClr val="334155"/>
+                        <a:srgbClr val="1E3A5F"/>
                       </a:solidFill>
                     </a:lnR>
                     <a:lnT w="6350" cmpd="sng">
                       <a:solidFill>
-                        <a:srgbClr val="334155"/>
+                        <a:srgbClr val="1E3A5F"/>
                       </a:solidFill>
                     </a:lnT>
                     <a:lnB w="6350" cmpd="sng">
                       <a:solidFill>
-                        <a:srgbClr val="334155"/>
+                        <a:srgbClr val="1E3A5F"/>
                       </a:solidFill>
                     </a:lnB>
                   </a:tcPr>
@@ -3636,22 +3636,22 @@
                     </a:solidFill>
                     <a:lnL w="6350" cmpd="sng">
                       <a:solidFill>
-                        <a:srgbClr val="334155"/>
+                        <a:srgbClr val="1E3A5F"/>
                       </a:solidFill>
                     </a:lnL>
                     <a:lnR w="6350" cmpd="sng">
                       <a:solidFill>
-                        <a:srgbClr val="334155"/>
+                        <a:srgbClr val="1E3A5F"/>
                       </a:solidFill>
                     </a:lnR>
                     <a:lnT w="6350" cmpd="sng">
                       <a:solidFill>
-                        <a:srgbClr val="334155"/>
+                        <a:srgbClr val="1E3A5F"/>
                       </a:solidFill>
                     </a:lnT>
                     <a:lnB w="6350" cmpd="sng">
                       <a:solidFill>
-                        <a:srgbClr val="334155"/>
+                        <a:srgbClr val="1E3A5F"/>
                       </a:solidFill>
                     </a:lnB>
                   </a:tcPr>
@@ -3686,22 +3686,22 @@
                     </a:solidFill>
                     <a:lnL w="6350" cmpd="sng">
                       <a:solidFill>
-                        <a:srgbClr val="334155"/>
+                        <a:srgbClr val="1E3A5F"/>
                       </a:solidFill>
                     </a:lnL>
                     <a:lnR w="6350" cmpd="sng">
                       <a:solidFill>
-                        <a:srgbClr val="334155"/>
+                        <a:srgbClr val="1E3A5F"/>
                       </a:solidFill>
                     </a:lnR>
                     <a:lnT w="6350" cmpd="sng">
                       <a:solidFill>
-                        <a:srgbClr val="334155"/>
+                        <a:srgbClr val="1E3A5F"/>
                       </a:solidFill>
                     </a:lnT>
                     <a:lnB w="6350" cmpd="sng">
                       <a:solidFill>
-                        <a:srgbClr val="334155"/>
+                        <a:srgbClr val="1E3A5F"/>
                       </a:solidFill>
                     </a:lnB>
                   </a:tcPr>
@@ -3738,22 +3738,22 @@
                     </a:solidFill>
                     <a:lnL w="6350" cmpd="sng">
                       <a:solidFill>
-                        <a:srgbClr val="334155"/>
+                        <a:srgbClr val="1E3A5F"/>
                       </a:solidFill>
                     </a:lnL>
                     <a:lnR w="6350" cmpd="sng">
                       <a:solidFill>
-                        <a:srgbClr val="334155"/>
+                        <a:srgbClr val="1E3A5F"/>
                       </a:solidFill>
                     </a:lnR>
                     <a:lnT w="6350" cmpd="sng">
                       <a:solidFill>
-                        <a:srgbClr val="334155"/>
+                        <a:srgbClr val="1E3A5F"/>
                       </a:solidFill>
                     </a:lnT>
                     <a:lnB w="6350" cmpd="sng">
                       <a:solidFill>
-                        <a:srgbClr val="334155"/>
+                        <a:srgbClr val="1E3A5F"/>
                       </a:solidFill>
                     </a:lnB>
                   </a:tcPr>
@@ -3778,7 +3778,7 @@
                           </a:solidFill>
                           <a:latin typeface="맑은 고딕"/>
                         </a:rPr>
-                        <a:t>주식회사 한빛글로벌 (연구전략Lab / ERP플랫폼기획팀 / RA Lab)</a:t>
+                        <a:t>주식회사 한빛글로벌 (공급망혁신팀 / ERP플랫폼기획팀 / 품질법무검증팀)</a:t>
                       </a:r>
                     </a:p>
                   </a:txBody>
@@ -3788,22 +3788,22 @@
                     </a:solidFill>
                     <a:lnL w="6350" cmpd="sng">
                       <a:solidFill>
-                        <a:srgbClr val="334155"/>
+                        <a:srgbClr val="1E3A5F"/>
                       </a:solidFill>
                     </a:lnL>
                     <a:lnR w="6350" cmpd="sng">
                       <a:solidFill>
-                        <a:srgbClr val="334155"/>
+                        <a:srgbClr val="1E3A5F"/>
                       </a:solidFill>
                     </a:lnR>
                     <a:lnT w="6350" cmpd="sng">
                       <a:solidFill>
-                        <a:srgbClr val="334155"/>
+                        <a:srgbClr val="1E3A5F"/>
                       </a:solidFill>
                     </a:lnT>
                     <a:lnB w="6350" cmpd="sng">
                       <a:solidFill>
-                        <a:srgbClr val="334155"/>
+                        <a:srgbClr val="1E3A5F"/>
                       </a:solidFill>
                     </a:lnB>
                   </a:tcPr>
@@ -3840,22 +3840,22 @@
                     </a:solidFill>
                     <a:lnL w="6350" cmpd="sng">
                       <a:solidFill>
-                        <a:srgbClr val="334155"/>
+                        <a:srgbClr val="1E3A5F"/>
                       </a:solidFill>
                     </a:lnL>
                     <a:lnR w="6350" cmpd="sng">
                       <a:solidFill>
-                        <a:srgbClr val="334155"/>
+                        <a:srgbClr val="1E3A5F"/>
                       </a:solidFill>
                     </a:lnR>
                     <a:lnT w="6350" cmpd="sng">
                       <a:solidFill>
-                        <a:srgbClr val="334155"/>
+                        <a:srgbClr val="1E3A5F"/>
                       </a:solidFill>
                     </a:lnT>
                     <a:lnB w="6350" cmpd="sng">
                       <a:solidFill>
-                        <a:srgbClr val="334155"/>
+                        <a:srgbClr val="1E3A5F"/>
                       </a:solidFill>
                     </a:lnB>
                   </a:tcPr>
@@ -3890,22 +3890,22 @@
                     </a:solidFill>
                     <a:lnL w="6350" cmpd="sng">
                       <a:solidFill>
-                        <a:srgbClr val="334155"/>
+                        <a:srgbClr val="1E3A5F"/>
                       </a:solidFill>
                     </a:lnL>
                     <a:lnR w="6350" cmpd="sng">
                       <a:solidFill>
-                        <a:srgbClr val="334155"/>
+                        <a:srgbClr val="1E3A5F"/>
                       </a:solidFill>
                     </a:lnR>
                     <a:lnT w="6350" cmpd="sng">
                       <a:solidFill>
-                        <a:srgbClr val="334155"/>
+                        <a:srgbClr val="1E3A5F"/>
                       </a:solidFill>
                     </a:lnT>
                     <a:lnB w="6350" cmpd="sng">
                       <a:solidFill>
-                        <a:srgbClr val="334155"/>
+                        <a:srgbClr val="1E3A5F"/>
                       </a:solidFill>
                     </a:lnB>
                   </a:tcPr>
@@ -3942,22 +3942,22 @@
                     </a:solidFill>
                     <a:lnL w="6350" cmpd="sng">
                       <a:solidFill>
-                        <a:srgbClr val="334155"/>
+                        <a:srgbClr val="1E3A5F"/>
                       </a:solidFill>
                     </a:lnL>
                     <a:lnR w="6350" cmpd="sng">
                       <a:solidFill>
-                        <a:srgbClr val="334155"/>
+                        <a:srgbClr val="1E3A5F"/>
                       </a:solidFill>
                     </a:lnR>
                     <a:lnT w="6350" cmpd="sng">
                       <a:solidFill>
-                        <a:srgbClr val="334155"/>
+                        <a:srgbClr val="1E3A5F"/>
                       </a:solidFill>
                     </a:lnT>
                     <a:lnB w="6350" cmpd="sng">
                       <a:solidFill>
-                        <a:srgbClr val="334155"/>
+                        <a:srgbClr val="1E3A5F"/>
                       </a:solidFill>
                     </a:lnB>
                   </a:tcPr>
@@ -3992,22 +3992,22 @@
                     </a:solidFill>
                     <a:lnL w="6350" cmpd="sng">
                       <a:solidFill>
-                        <a:srgbClr val="334155"/>
+                        <a:srgbClr val="1E3A5F"/>
                       </a:solidFill>
                     </a:lnL>
                     <a:lnR w="6350" cmpd="sng">
                       <a:solidFill>
-                        <a:srgbClr val="334155"/>
+                        <a:srgbClr val="1E3A5F"/>
                       </a:solidFill>
                     </a:lnR>
                     <a:lnT w="6350" cmpd="sng">
                       <a:solidFill>
-                        <a:srgbClr val="334155"/>
+                        <a:srgbClr val="1E3A5F"/>
                       </a:solidFill>
                     </a:lnT>
                     <a:lnB w="6350" cmpd="sng">
                       <a:solidFill>
-                        <a:srgbClr val="334155"/>
+                        <a:srgbClr val="1E3A5F"/>
                       </a:solidFill>
                     </a:lnB>
                   </a:tcPr>
@@ -4709,11 +4709,11 @@
             <a:avLst/>
           </a:prstGeom>
           <a:solidFill>
-            <a:srgbClr val="1E293B"/>
+            <a:srgbClr val="0F2942"/>
           </a:solidFill>
           <a:ln w="12700">
             <a:solidFill>
-              <a:srgbClr val="334155"/>
+              <a:srgbClr val="1E3A5F"/>
             </a:solidFill>
           </a:ln>
         </p:spPr>
@@ -4913,7 +4913,7 @@
                 </a:solidFill>
                 <a:latin typeface="맑은 고딕"/>
               </a:rPr>
-              <a:t>• 본 문서는 전사 표준 프로젝트 관리 템플릿이자 한빛글로벌 SyncGuard AI 실전 기준서입니다.</a:t>
+              <a:t>• 본 문서는 전사 표준 프로젝트 관리 템플릿이자 한빛글로벌 SyncFlow AI 실전 기준서입니다.</a:t>
             </a:r>
           </a:p>
           <a:p>
@@ -5265,7 +5265,7 @@
                 </a:solidFill>
                 <a:latin typeface="맑은 고딕"/>
               </a:rPr>
-              <a:t>한빛글로벌 SyncGuard AI 시스템 구축  |  보고체계 관리 계획서</a:t>
+              <a:t>한빛글로벌 SyncFlow AI 시스템 구축  |  보고체계 관리 계획서</a:t>
             </a:r>
           </a:p>
         </p:txBody>
@@ -5569,7 +5569,7 @@
             <a:r>
               <a:rPr sz="950" b="0">
                 <a:solidFill>
-                  <a:srgbClr val="1E293B"/>
+                  <a:srgbClr val="0F2942"/>
                 </a:solidFill>
                 <a:latin typeface="맑은 고딕"/>
               </a:rPr>
@@ -5588,7 +5588,7 @@
             <a:r>
               <a:rPr sz="950" b="0">
                 <a:solidFill>
-                  <a:srgbClr val="1E293B"/>
+                  <a:srgbClr val="0F2942"/>
                 </a:solidFill>
                 <a:latin typeface="맑은 고딕"/>
               </a:rPr>
@@ -5607,7 +5607,7 @@
             <a:r>
               <a:rPr sz="950" b="0">
                 <a:solidFill>
-                  <a:srgbClr val="1E293B"/>
+                  <a:srgbClr val="0F2942"/>
                 </a:solidFill>
                 <a:latin typeface="맑은 고딕"/>
               </a:rPr>
@@ -5626,7 +5626,7 @@
             <a:r>
               <a:rPr sz="950" b="0">
                 <a:solidFill>
-                  <a:srgbClr val="1E293B"/>
+                  <a:srgbClr val="0F2942"/>
                 </a:solidFill>
                 <a:latin typeface="맑은 고딕"/>
               </a:rPr>
@@ -5645,7 +5645,7 @@
             <a:r>
               <a:rPr sz="950" b="0">
                 <a:solidFill>
-                  <a:srgbClr val="1E293B"/>
+                  <a:srgbClr val="0F2942"/>
                 </a:solidFill>
                 <a:latin typeface="맑은 고딕"/>
               </a:rPr>
@@ -5664,7 +5664,7 @@
             <a:r>
               <a:rPr sz="950" b="0">
                 <a:solidFill>
-                  <a:srgbClr val="1E293B"/>
+                  <a:srgbClr val="0F2942"/>
                 </a:solidFill>
                 <a:latin typeface="맑은 고딕"/>
               </a:rPr>
@@ -5683,11 +5683,11 @@
             <a:r>
               <a:rPr sz="950" b="0">
                 <a:solidFill>
-                  <a:srgbClr val="1E293B"/>
+                  <a:srgbClr val="0F2942"/>
                 </a:solidFill>
                 <a:latin typeface="맑은 고딕"/>
               </a:rPr>
-              <a:t>• 파트별(기획/설계, AI 엔진, 백엔드/인프라, 실증DB) 세부 진행 내역</a:t>
+              <a:t>• 파트별(기획/설계, AI 엔진, 백엔드/인프라, 시험검증DB) 세부 진행 내역</a:t>
             </a:r>
           </a:p>
           <a:p>
@@ -5702,7 +5702,7 @@
             <a:r>
               <a:rPr sz="950" b="0">
                 <a:solidFill>
-                  <a:srgbClr val="1E293B"/>
+                  <a:srgbClr val="0F2942"/>
                 </a:solidFill>
                 <a:latin typeface="맑은 고딕"/>
               </a:rPr>
@@ -5721,7 +5721,7 @@
             <a:r>
               <a:rPr sz="950" b="0">
                 <a:solidFill>
-                  <a:srgbClr val="1E293B"/>
+                  <a:srgbClr val="0F2942"/>
                 </a:solidFill>
                 <a:latin typeface="맑은 고딕"/>
               </a:rPr>
@@ -5740,7 +5740,7 @@
             <a:r>
               <a:rPr sz="950" b="0">
                 <a:solidFill>
-                  <a:srgbClr val="1E293B"/>
+                  <a:srgbClr val="0F2942"/>
                 </a:solidFill>
                 <a:latin typeface="맑은 고딕"/>
               </a:rPr>
@@ -5759,7 +5759,7 @@
             <a:r>
               <a:rPr sz="950" b="0">
                 <a:solidFill>
-                  <a:srgbClr val="1E293B"/>
+                  <a:srgbClr val="0F2942"/>
                 </a:solidFill>
                 <a:latin typeface="맑은 고딕"/>
               </a:rPr>
@@ -5778,7 +5778,7 @@
             <a:r>
               <a:rPr sz="950" b="0">
                 <a:solidFill>
-                  <a:srgbClr val="1E293B"/>
+                  <a:srgbClr val="0F2942"/>
                 </a:solidFill>
                 <a:latin typeface="맑은 고딕"/>
               </a:rPr>
@@ -5797,7 +5797,7 @@
             <a:r>
               <a:rPr sz="950" b="0">
                 <a:solidFill>
-                  <a:srgbClr val="1E293B"/>
+                  <a:srgbClr val="0F2942"/>
                 </a:solidFill>
                 <a:latin typeface="맑은 고딕"/>
               </a:rPr>
@@ -6021,7 +6021,7 @@
             <a:r>
               <a:rPr sz="950" b="0">
                 <a:solidFill>
-                  <a:srgbClr val="1E293B"/>
+                  <a:srgbClr val="0F2942"/>
                 </a:solidFill>
                 <a:latin typeface="맑은 고딕"/>
               </a:rPr>
@@ -6040,7 +6040,7 @@
             <a:r>
               <a:rPr sz="950" b="0">
                 <a:solidFill>
-                  <a:srgbClr val="1E293B"/>
+                  <a:srgbClr val="0F2942"/>
                 </a:solidFill>
                 <a:latin typeface="맑은 고딕"/>
               </a:rPr>
@@ -6059,7 +6059,7 @@
             <a:r>
               <a:rPr sz="950" b="0">
                 <a:solidFill>
-                  <a:srgbClr val="1E293B"/>
+                  <a:srgbClr val="0F2942"/>
                 </a:solidFill>
                 <a:latin typeface="맑은 고딕"/>
               </a:rPr>
@@ -6078,7 +6078,7 @@
             <a:r>
               <a:rPr sz="950" b="0">
                 <a:solidFill>
-                  <a:srgbClr val="1E293B"/>
+                  <a:srgbClr val="0F2942"/>
                 </a:solidFill>
                 <a:latin typeface="맑은 고딕"/>
               </a:rPr>
@@ -6097,7 +6097,7 @@
             <a:r>
               <a:rPr sz="950" b="0">
                 <a:solidFill>
-                  <a:srgbClr val="1E293B"/>
+                  <a:srgbClr val="0F2942"/>
                 </a:solidFill>
                 <a:latin typeface="맑은 고딕"/>
               </a:rPr>
@@ -6116,7 +6116,7 @@
             <a:r>
               <a:rPr sz="950" b="0">
                 <a:solidFill>
-                  <a:srgbClr val="1E293B"/>
+                  <a:srgbClr val="0F2942"/>
                 </a:solidFill>
                 <a:latin typeface="맑은 고딕"/>
               </a:rPr>
@@ -6135,7 +6135,7 @@
             <a:r>
               <a:rPr sz="950" b="0">
                 <a:solidFill>
-                  <a:srgbClr val="1E293B"/>
+                  <a:srgbClr val="0F2942"/>
                 </a:solidFill>
                 <a:latin typeface="맑은 고딕"/>
               </a:rPr>
@@ -6154,7 +6154,7 @@
             <a:r>
               <a:rPr sz="950" b="0">
                 <a:solidFill>
-                  <a:srgbClr val="1E293B"/>
+                  <a:srgbClr val="0F2942"/>
                 </a:solidFill>
                 <a:latin typeface="맑은 고딕"/>
               </a:rPr>
@@ -6173,7 +6173,7 @@
             <a:r>
               <a:rPr sz="950" b="0">
                 <a:solidFill>
-                  <a:srgbClr val="1E293B"/>
+                  <a:srgbClr val="0F2942"/>
                 </a:solidFill>
                 <a:latin typeface="맑은 고딕"/>
               </a:rPr>
@@ -6192,7 +6192,7 @@
             <a:r>
               <a:rPr sz="950" b="0">
                 <a:solidFill>
-                  <a:srgbClr val="1E293B"/>
+                  <a:srgbClr val="0F2942"/>
                 </a:solidFill>
                 <a:latin typeface="맑은 고딕"/>
               </a:rPr>
@@ -6211,7 +6211,7 @@
             <a:r>
               <a:rPr sz="950" b="0">
                 <a:solidFill>
-                  <a:srgbClr val="1E293B"/>
+                  <a:srgbClr val="0F2942"/>
                 </a:solidFill>
                 <a:latin typeface="맑은 고딕"/>
               </a:rPr>
@@ -6230,7 +6230,7 @@
             <a:r>
               <a:rPr sz="950" b="0">
                 <a:solidFill>
-                  <a:srgbClr val="1E293B"/>
+                  <a:srgbClr val="0F2942"/>
                 </a:solidFill>
                 <a:latin typeface="맑은 고딕"/>
               </a:rPr>
@@ -6249,7 +6249,7 @@
             <a:r>
               <a:rPr sz="950" b="0">
                 <a:solidFill>
-                  <a:srgbClr val="1E293B"/>
+                  <a:srgbClr val="0F2942"/>
                 </a:solidFill>
                 <a:latin typeface="맑은 고딕"/>
               </a:rPr>
@@ -6383,7 +6383,7 @@
                 </a:solidFill>
                 <a:latin typeface="맑은 고딕"/>
               </a:rPr>
-              <a:t>활용 가이드 : 타 프로젝트 적용 시 한빛글로벌 SyncGuard AI, 발주사/수행사 명칭, 연락망(9쪽)만 해당 과제 정보로 교체하면 즉시 표준 보고체계로 운영 가능합니다.</a:t>
+              <a:t>활용 가이드 : 타 프로젝트 적용 시 한빛글로벌 SyncFlow AI, 발주사/수행사 명칭, 연락망(9쪽)만 해당 과제 정보로 교체하면 즉시 표준 보고체계로 운영 가능합니다.</a:t>
             </a:r>
           </a:p>
         </p:txBody>
@@ -6697,7 +6697,7 @@
                 </a:solidFill>
                 <a:latin typeface="맑은 고딕"/>
               </a:rPr>
-              <a:t>한빛글로벌 SyncGuard AI 시스템 구축  |  보고체계 관리 계획서</a:t>
+              <a:t>한빛글로벌 SyncFlow AI 시스템 구축  |  보고체계 관리 계획서</a:t>
             </a:r>
           </a:p>
         </p:txBody>
@@ -7122,7 +7122,7 @@
                       <a:r>
                         <a:rPr sz="900" b="1">
                           <a:solidFill>
-                            <a:srgbClr val="1E293B"/>
+                            <a:srgbClr val="0F2942"/>
                           </a:solidFill>
                           <a:latin typeface="맑은 고딕"/>
                         </a:rPr>
@@ -7172,7 +7172,7 @@
                       <a:r>
                         <a:rPr sz="900" b="0">
                           <a:solidFill>
-                            <a:srgbClr val="1E293B"/>
+                            <a:srgbClr val="0F2942"/>
                           </a:solidFill>
                           <a:latin typeface="맑은 고딕"/>
                         </a:rPr>
@@ -7222,7 +7222,7 @@
                       <a:r>
                         <a:rPr sz="900" b="0">
                           <a:solidFill>
-                            <a:srgbClr val="1E293B"/>
+                            <a:srgbClr val="0F2942"/>
                           </a:solidFill>
                           <a:latin typeface="맑은 고딕"/>
                         </a:rPr>
@@ -7272,7 +7272,7 @@
                       <a:r>
                         <a:rPr sz="900" b="0">
                           <a:solidFill>
-                            <a:srgbClr val="1E293B"/>
+                            <a:srgbClr val="0F2942"/>
                           </a:solidFill>
                           <a:latin typeface="맑은 고딕"/>
                         </a:rPr>
@@ -7322,7 +7322,7 @@
                       <a:r>
                         <a:rPr sz="900" b="0">
                           <a:solidFill>
-                            <a:srgbClr val="1E293B"/>
+                            <a:srgbClr val="0F2942"/>
                           </a:solidFill>
                           <a:latin typeface="맑은 고딕"/>
                         </a:rPr>
@@ -7374,7 +7374,7 @@
                       <a:r>
                         <a:rPr sz="900" b="1">
                           <a:solidFill>
-                            <a:srgbClr val="1E293B"/>
+                            <a:srgbClr val="0F2942"/>
                           </a:solidFill>
                           <a:latin typeface="맑은 고딕"/>
                         </a:rPr>
@@ -7424,7 +7424,7 @@
                       <a:r>
                         <a:rPr sz="900" b="0">
                           <a:solidFill>
-                            <a:srgbClr val="1E293B"/>
+                            <a:srgbClr val="0F2942"/>
                           </a:solidFill>
                           <a:latin typeface="맑은 고딕"/>
                         </a:rPr>
@@ -7474,7 +7474,7 @@
                       <a:r>
                         <a:rPr sz="900" b="0">
                           <a:solidFill>
-                            <a:srgbClr val="1E293B"/>
+                            <a:srgbClr val="0F2942"/>
                           </a:solidFill>
                           <a:latin typeface="맑은 고딕"/>
                         </a:rPr>
@@ -7524,7 +7524,7 @@
                       <a:r>
                         <a:rPr sz="900" b="0">
                           <a:solidFill>
-                            <a:srgbClr val="1E293B"/>
+                            <a:srgbClr val="0F2942"/>
                           </a:solidFill>
                           <a:latin typeface="맑은 고딕"/>
                         </a:rPr>
@@ -7574,7 +7574,7 @@
                       <a:r>
                         <a:rPr sz="900" b="0">
                           <a:solidFill>
-                            <a:srgbClr val="1E293B"/>
+                            <a:srgbClr val="0F2942"/>
                           </a:solidFill>
                           <a:latin typeface="맑은 고딕"/>
                         </a:rPr>
@@ -7626,7 +7626,7 @@
                       <a:r>
                         <a:rPr sz="900" b="1">
                           <a:solidFill>
-                            <a:srgbClr val="1E293B"/>
+                            <a:srgbClr val="0F2942"/>
                           </a:solidFill>
                           <a:latin typeface="맑은 고딕"/>
                         </a:rPr>
@@ -7676,7 +7676,7 @@
                       <a:r>
                         <a:rPr sz="900" b="0">
                           <a:solidFill>
-                            <a:srgbClr val="1E293B"/>
+                            <a:srgbClr val="0F2942"/>
                           </a:solidFill>
                           <a:latin typeface="맑은 고딕"/>
                         </a:rPr>
@@ -7726,7 +7726,7 @@
                       <a:r>
                         <a:rPr sz="900" b="0">
                           <a:solidFill>
-                            <a:srgbClr val="1E293B"/>
+                            <a:srgbClr val="0F2942"/>
                           </a:solidFill>
                           <a:latin typeface="맑은 고딕"/>
                         </a:rPr>
@@ -7776,7 +7776,7 @@
                       <a:r>
                         <a:rPr sz="900" b="0">
                           <a:solidFill>
-                            <a:srgbClr val="1E293B"/>
+                            <a:srgbClr val="0F2942"/>
                           </a:solidFill>
                           <a:latin typeface="맑은 고딕"/>
                         </a:rPr>
@@ -7826,7 +7826,7 @@
                       <a:r>
                         <a:rPr sz="900" b="0">
                           <a:solidFill>
-                            <a:srgbClr val="1E293B"/>
+                            <a:srgbClr val="0F2942"/>
                           </a:solidFill>
                           <a:latin typeface="맑은 고딕"/>
                         </a:rPr>
@@ -8080,7 +8080,7 @@
             <a:r>
               <a:rPr sz="950" b="0">
                 <a:solidFill>
-                  <a:srgbClr val="1E293B"/>
+                  <a:srgbClr val="0F2942"/>
                 </a:solidFill>
                 <a:latin typeface="맑은 고딕"/>
               </a:rPr>
@@ -8099,7 +8099,7 @@
             <a:r>
               <a:rPr sz="950" b="0">
                 <a:solidFill>
-                  <a:srgbClr val="1E293B"/>
+                  <a:srgbClr val="0F2942"/>
                 </a:solidFill>
                 <a:latin typeface="맑은 고딕"/>
               </a:rPr>
@@ -8118,11 +8118,11 @@
             <a:r>
               <a:rPr sz="950" b="0">
                 <a:solidFill>
-                  <a:srgbClr val="1E293B"/>
+                  <a:srgbClr val="0F2942"/>
                 </a:solidFill>
                 <a:latin typeface="맑은 고딕"/>
               </a:rPr>
-              <a:t>3. 교체 필수 항목 : SyncGuard AI 시스템 구축 사업, [발주사/수행사 조직], [사업기간 및 M1~M6 일정], [산출물 ID 체계], [인력/인프라 수량]</a:t>
+              <a:t>3. 교체 필수 항목 : SyncFlow AI 시스템 구축 사업, [발주사/수행사 조직], [사업기간 및 M1~M6 일정], [산출물 ID 체계], [인력/인프라 수량]</a:t>
             </a:r>
           </a:p>
           <a:p>
@@ -8137,7 +8137,7 @@
             <a:r>
               <a:rPr sz="950" b="0">
                 <a:solidFill>
-                  <a:srgbClr val="1E293B"/>
+                  <a:srgbClr val="0F2942"/>
                 </a:solidFill>
                 <a:latin typeface="맑은 고딕"/>
               </a:rPr>
@@ -8653,7 +8653,7 @@
                 </a:solidFill>
                 <a:latin typeface="맑은 고딕"/>
               </a:rPr>
-              <a:t>발주사(연구전략/ERP/RA)·주관사(엠파시)·협력사(데이터브릿지) 소통 구조</a:t>
+              <a:t>발주사(연구전략/ERP/QA)·주관사(엠파시)·협력사(데이터브릿지) 소통 구조</a:t>
             </a:r>
           </a:p>
         </p:txBody>
@@ -10417,7 +10417,7 @@
                 </a:solidFill>
                 <a:latin typeface="맑은 고딕"/>
               </a:rPr>
-              <a:t>다수 이해관계자(현업 RA, IT 인프라, AI 개발, 실증DB 연계) 간 정보 왜곡을 방지하고 신속·투명한 의사결정을 지원합니다.</a:t>
+              <a:t>다수 이해관계자(현업 QA, IT 인프라, AI 개발, 시험검증DB 연계) 간 정보 왜곡을 방지하고 신속·투명한 의사결정을 지원합니다.</a:t>
             </a:r>
           </a:p>
         </p:txBody>
@@ -10545,7 +10545,7 @@
                 </a:solidFill>
                 <a:latin typeface="맑은 고딕"/>
               </a:rPr>
-              <a:t>한빛글로벌 SyncGuard AI 시스템 구축  |  보고체계 관리 계획서</a:t>
+              <a:t>한빛글로벌 SyncFlow AI 시스템 구축  |  보고체계 관리 계획서</a:t>
             </a:r>
           </a:p>
         </p:txBody>
@@ -10849,7 +10849,7 @@
             <a:r>
               <a:rPr sz="1050" b="0">
                 <a:solidFill>
-                  <a:srgbClr val="1E293B"/>
+                  <a:srgbClr val="0F2942"/>
                 </a:solidFill>
                 <a:latin typeface="맑은 고딕"/>
               </a:rPr>
@@ -10868,7 +10868,7 @@
             <a:r>
               <a:rPr sz="1050" b="0">
                 <a:solidFill>
-                  <a:srgbClr val="1E293B"/>
+                  <a:srgbClr val="0F2942"/>
                 </a:solidFill>
                 <a:latin typeface="맑은 고딕"/>
               </a:rPr>
@@ -10887,11 +10887,11 @@
             <a:r>
               <a:rPr sz="1050" b="0">
                 <a:solidFill>
-                  <a:srgbClr val="1E293B"/>
+                  <a:srgbClr val="0F2942"/>
                 </a:solidFill>
                 <a:latin typeface="맑은 고딕"/>
               </a:rPr>
-              <a:t>• 협력사(데이터브릿지)의 ProductLab 연계 이슈 역시 수행사 PM/AA가 통합 취합하여 발주사 기술 PM과 일괄 협의</a:t>
+              <a:t>• 협력사(데이터브릿지)의 PLM-Nexus 연계 이슈 역시 수행사 PM/AA가 통합 취합하여 발주사 기술 PM과 일괄 협의</a:t>
             </a:r>
           </a:p>
         </p:txBody>
@@ -11111,7 +11111,7 @@
             <a:r>
               <a:rPr sz="1050" b="0">
                 <a:solidFill>
-                  <a:srgbClr val="1E293B"/>
+                  <a:srgbClr val="0F2942"/>
                 </a:solidFill>
                 <a:latin typeface="맑은 고딕"/>
               </a:rPr>
@@ -11130,7 +11130,7 @@
             <a:r>
               <a:rPr sz="1050" b="0">
                 <a:solidFill>
-                  <a:srgbClr val="1E293B"/>
+                  <a:srgbClr val="0F2942"/>
                 </a:solidFill>
                 <a:latin typeface="맑은 고딕"/>
               </a:rPr>
@@ -11149,7 +11149,7 @@
             <a:r>
               <a:rPr sz="1050" b="0">
                 <a:solidFill>
-                  <a:srgbClr val="1E293B"/>
+                  <a:srgbClr val="0F2942"/>
                 </a:solidFill>
                 <a:latin typeface="맑은 고딕"/>
               </a:rPr>
@@ -11373,7 +11373,7 @@
             <a:r>
               <a:rPr sz="1050" b="0">
                 <a:solidFill>
-                  <a:srgbClr val="1E293B"/>
+                  <a:srgbClr val="0F2942"/>
                 </a:solidFill>
                 <a:latin typeface="맑은 고딕"/>
               </a:rPr>
@@ -11392,7 +11392,7 @@
             <a:r>
               <a:rPr sz="1050" b="0">
                 <a:solidFill>
-                  <a:srgbClr val="1E293B"/>
+                  <a:srgbClr val="0F2942"/>
                 </a:solidFill>
                 <a:latin typeface="맑은 고딕"/>
               </a:rPr>
@@ -11411,7 +11411,7 @@
             <a:r>
               <a:rPr sz="1050" b="0">
                 <a:solidFill>
-                  <a:srgbClr val="1E293B"/>
+                  <a:srgbClr val="0F2942"/>
                 </a:solidFill>
                 <a:latin typeface="맑은 고딕"/>
               </a:rPr>
@@ -11635,11 +11635,11 @@
             <a:r>
               <a:rPr sz="1050" b="0">
                 <a:solidFill>
-                  <a:srgbClr val="1E293B"/>
+                  <a:srgbClr val="0F2942"/>
                 </a:solidFill>
                 <a:latin typeface="맑은 고딕"/>
               </a:rPr>
-              <a:t>• 인프라 방화벽 개통 지연, SSO/MarketingHub 연계 사양 미확정 등 외부 의존성 병목은 발생 즉시 주간보고 '협조요청'에 적시</a:t>
+              <a:t>• 인프라 방화벽 개통 지연, SSO/SRM-Portal 연계 사양 미확정 등 외부 의존성 병목은 발생 즉시 주간보고 '협조요청'에 적시</a:t>
             </a:r>
           </a:p>
           <a:p>
@@ -11654,7 +11654,7 @@
             <a:r>
               <a:rPr sz="1050" b="0">
                 <a:solidFill>
-                  <a:srgbClr val="1E293B"/>
+                  <a:srgbClr val="0F2942"/>
                 </a:solidFill>
                 <a:latin typeface="맑은 고딕"/>
               </a:rPr>
@@ -11673,7 +11673,7 @@
             <a:r>
               <a:rPr sz="1050" b="0">
                 <a:solidFill>
-                  <a:srgbClr val="1E293B"/>
+                  <a:srgbClr val="0F2942"/>
                 </a:solidFill>
                 <a:latin typeface="맑은 고딕"/>
               </a:rPr>
@@ -11993,7 +11993,7 @@
                 </a:solidFill>
                 <a:latin typeface="맑은 고딕"/>
               </a:rPr>
-              <a:t>사업 총괄 의사결정 기구부터 현업(RA Lab)·기술(ERP플랫폼)·실증DB(데이터브릿지) 실무 협의체까지 유기적 소통 체계를 운영합니다.</a:t>
+              <a:t>사업 총괄 의사결정 기구부터 현업(품질법무검증팀)·기술(ERP플랫폼)·시험검증DB(데이터브릿지) 실무 협의체까지 유기적 소통 체계를 운영합니다.</a:t>
             </a:r>
           </a:p>
         </p:txBody>
@@ -12121,7 +12121,7 @@
                 </a:solidFill>
                 <a:latin typeface="맑은 고딕"/>
               </a:rPr>
-              <a:t>한빛글로벌 SyncGuard AI 시스템 구축  |  보고체계 관리 계획서</a:t>
+              <a:t>한빛글로벌 SyncFlow AI 시스템 구축  |  보고체계 관리 계획서</a:t>
             </a:r>
           </a:p>
         </p:txBody>
@@ -12425,7 +12425,7 @@
             <a:r>
               <a:rPr sz="950" b="0">
                 <a:solidFill>
-                  <a:srgbClr val="1E293B"/>
+                  <a:srgbClr val="0F2942"/>
                 </a:solidFill>
                 <a:latin typeface="맑은 고딕"/>
               </a:rPr>
@@ -12444,11 +12444,11 @@
             <a:r>
               <a:rPr sz="950" b="0">
                 <a:solidFill>
-                  <a:srgbClr val="1E293B"/>
+                  <a:srgbClr val="0F2942"/>
                 </a:solidFill>
                 <a:latin typeface="맑은 고딕"/>
               </a:rPr>
-              <a:t>• 현업 PM : 정민수 (연구전략Lab / 010-2726-6624)</a:t>
+              <a:t>• 현업 PM : 정민수 (공급망혁신팀 / 010-2726-6624)</a:t>
             </a:r>
           </a:p>
           <a:p>
@@ -12463,7 +12463,7 @@
             <a:r>
               <a:rPr sz="950" b="0">
                 <a:solidFill>
-                  <a:srgbClr val="1E293B"/>
+                  <a:srgbClr val="0F2942"/>
                 </a:solidFill>
                 <a:latin typeface="맑은 고딕"/>
               </a:rPr>
@@ -12482,7 +12482,7 @@
             <a:r>
               <a:rPr sz="950" b="0">
                 <a:solidFill>
-                  <a:srgbClr val="1E293B"/>
+                  <a:srgbClr val="0F2942"/>
                 </a:solidFill>
                 <a:latin typeface="맑은 고딕"/>
               </a:rPr>
@@ -12501,11 +12501,11 @@
             <a:r>
               <a:rPr sz="950" b="0">
                 <a:solidFill>
-                  <a:srgbClr val="1E293B"/>
+                  <a:srgbClr val="0F2942"/>
                 </a:solidFill>
                 <a:latin typeface="맑은 고딕"/>
               </a:rPr>
-              <a:t>  - AWS 클라우드 인프라, SSO/MarketingHub/보안 정책 총괄</a:t>
+              <a:t>  - AWS 클라우드 인프라, SSO/SRM-Portal/보안 정책 총괄</a:t>
             </a:r>
           </a:p>
           <a:p>
@@ -12520,7 +12520,7 @@
             <a:r>
               <a:rPr sz="950" b="0">
                 <a:solidFill>
-                  <a:srgbClr val="1E293B"/>
+                  <a:srgbClr val="0F2942"/>
                 </a:solidFill>
                 <a:latin typeface="맑은 고딕"/>
               </a:rPr>
@@ -12539,11 +12539,11 @@
             <a:r>
               <a:rPr sz="950" b="0">
                 <a:solidFill>
-                  <a:srgbClr val="1E293B"/>
+                  <a:srgbClr val="0F2942"/>
                 </a:solidFill>
                 <a:latin typeface="맑은 고딕"/>
               </a:rPr>
-              <a:t>■ 현업 실무 요구사항 및 검증 (RA Lab 4인)</a:t>
+              <a:t>■ 현업 실무 요구사항 및 검증 (품질법무검증팀 4인)</a:t>
             </a:r>
           </a:p>
           <a:p>
@@ -12558,7 +12558,7 @@
             <a:r>
               <a:rPr sz="950" b="0">
                 <a:solidFill>
-                  <a:srgbClr val="1E293B"/>
+                  <a:srgbClr val="0F2942"/>
                 </a:solidFill>
                 <a:latin typeface="맑은 고딕"/>
               </a:rPr>
@@ -12577,11 +12577,11 @@
             <a:r>
               <a:rPr sz="950" b="0">
                 <a:solidFill>
-                  <a:srgbClr val="1E293B"/>
+                  <a:srgbClr val="0F2942"/>
                 </a:solidFill>
                 <a:latin typeface="맑은 고딕"/>
               </a:rPr>
-              <a:t>  - 제품 표시·광고 실증 및 클레임 검토 프로세스 정의</a:t>
+              <a:t>  - 구매계약·기술규격 시험검증 및 규격·계약 검토 프로세스 정의</a:t>
             </a:r>
           </a:p>
           <a:p>
@@ -12596,11 +12596,11 @@
             <a:r>
               <a:rPr sz="950" b="0">
                 <a:solidFill>
-                  <a:srgbClr val="1E293B"/>
+                  <a:srgbClr val="0F2942"/>
                 </a:solidFill>
                 <a:latin typeface="맑은 고딕"/>
               </a:rPr>
-              <a:t>  - 100대 금지/주의 규칙사전 및 AI 대체문구 품질 검증</a:t>
+              <a:t>  - 100대 금지/주의 규칙사전 및 AI 표준수정조항 품질 검증</a:t>
             </a:r>
           </a:p>
           <a:p>
@@ -12615,7 +12615,7 @@
             <a:r>
               <a:rPr sz="950" b="0">
                 <a:solidFill>
-                  <a:srgbClr val="1E293B"/>
+                  <a:srgbClr val="0F2942"/>
                 </a:solidFill>
                 <a:latin typeface="맑은 고딕"/>
               </a:rPr>
@@ -12634,7 +12634,7 @@
             <a:r>
               <a:rPr sz="950" b="0">
                 <a:solidFill>
-                  <a:srgbClr val="1E293B"/>
+                  <a:srgbClr val="0F2942"/>
                 </a:solidFill>
                 <a:latin typeface="맑은 고딕"/>
               </a:rPr>
@@ -12653,7 +12653,7 @@
             <a:r>
               <a:rPr sz="950" b="0">
                 <a:solidFill>
-                  <a:srgbClr val="1E293B"/>
+                  <a:srgbClr val="0F2942"/>
                 </a:solidFill>
                 <a:latin typeface="맑은 고딕"/>
               </a:rPr>
@@ -12672,11 +12672,11 @@
             <a:r>
               <a:rPr sz="950" b="0">
                 <a:solidFill>
-                  <a:srgbClr val="1E293B"/>
+                  <a:srgbClr val="0F2942"/>
                 </a:solidFill>
                 <a:latin typeface="맑은 고딕"/>
               </a:rPr>
-              <a:t>• 정보보안팀(망분리/방화벽/CA-PAM), MarketingHub 운영팀</a:t>
+              <a:t>• 정보보안팀(망분리/방화벽/CA-PAM), SRM-Portal 운영팀</a:t>
             </a:r>
           </a:p>
         </p:txBody>
@@ -12896,7 +12896,7 @@
             <a:r>
               <a:rPr sz="950" b="0">
                 <a:solidFill>
-                  <a:srgbClr val="1E293B"/>
+                  <a:srgbClr val="0F2942"/>
                 </a:solidFill>
                 <a:latin typeface="맑은 고딕"/>
               </a:rPr>
@@ -12915,7 +12915,7 @@
             <a:r>
               <a:rPr sz="950" b="0">
                 <a:solidFill>
-                  <a:srgbClr val="1E293B"/>
+                  <a:srgbClr val="0F2942"/>
                 </a:solidFill>
                 <a:latin typeface="맑은 고딕"/>
               </a:rPr>
@@ -12934,7 +12934,7 @@
             <a:r>
               <a:rPr sz="950" b="0">
                 <a:solidFill>
-                  <a:srgbClr val="1E293B"/>
+                  <a:srgbClr val="0F2942"/>
                 </a:solidFill>
                 <a:latin typeface="맑은 고딕"/>
               </a:rPr>
@@ -12953,7 +12953,7 @@
             <a:r>
               <a:rPr sz="950" b="0">
                 <a:solidFill>
-                  <a:srgbClr val="1E293B"/>
+                  <a:srgbClr val="0F2942"/>
                 </a:solidFill>
                 <a:latin typeface="맑은 고딕"/>
               </a:rPr>
@@ -12972,7 +12972,7 @@
             <a:r>
               <a:rPr sz="950" b="0">
                 <a:solidFill>
-                  <a:srgbClr val="1E293B"/>
+                  <a:srgbClr val="0F2942"/>
                 </a:solidFill>
                 <a:latin typeface="맑은 고딕"/>
               </a:rPr>
@@ -12991,7 +12991,7 @@
             <a:r>
               <a:rPr sz="950" b="0">
                 <a:solidFill>
-                  <a:srgbClr val="1E293B"/>
+                  <a:srgbClr val="0F2942"/>
                 </a:solidFill>
                 <a:latin typeface="맑은 고딕"/>
               </a:rPr>
@@ -13010,7 +13010,7 @@
             <a:r>
               <a:rPr sz="950" b="0">
                 <a:solidFill>
-                  <a:srgbClr val="1E293B"/>
+                  <a:srgbClr val="0F2942"/>
                 </a:solidFill>
                 <a:latin typeface="맑은 고딕"/>
               </a:rPr>
@@ -13029,7 +13029,7 @@
             <a:r>
               <a:rPr sz="950" b="0">
                 <a:solidFill>
-                  <a:srgbClr val="1E293B"/>
+                  <a:srgbClr val="0F2942"/>
                 </a:solidFill>
                 <a:latin typeface="맑은 고딕"/>
               </a:rPr>
@@ -13048,7 +13048,7 @@
             <a:r>
               <a:rPr sz="950" b="0">
                 <a:solidFill>
-                  <a:srgbClr val="1E293B"/>
+                  <a:srgbClr val="0F2942"/>
                 </a:solidFill>
                 <a:latin typeface="맑은 고딕"/>
               </a:rPr>
@@ -13067,7 +13067,7 @@
             <a:r>
               <a:rPr sz="950" b="0">
                 <a:solidFill>
-                  <a:srgbClr val="1E293B"/>
+                  <a:srgbClr val="0F2942"/>
                 </a:solidFill>
                 <a:latin typeface="맑은 고딕"/>
               </a:rPr>
@@ -13086,7 +13086,7 @@
             <a:r>
               <a:rPr sz="950" b="0">
                 <a:solidFill>
-                  <a:srgbClr val="1E293B"/>
+                  <a:srgbClr val="0F2942"/>
                 </a:solidFill>
                 <a:latin typeface="맑은 고딕"/>
               </a:rPr>
@@ -13105,7 +13105,7 @@
             <a:r>
               <a:rPr sz="950" b="0">
                 <a:solidFill>
-                  <a:srgbClr val="1E293B"/>
+                  <a:srgbClr val="0F2942"/>
                 </a:solidFill>
                 <a:latin typeface="맑은 고딕"/>
               </a:rPr>
@@ -13124,7 +13124,7 @@
             <a:r>
               <a:rPr sz="950" b="0">
                 <a:solidFill>
-                  <a:srgbClr val="1E293B"/>
+                  <a:srgbClr val="0F2942"/>
                 </a:solidFill>
                 <a:latin typeface="맑은 고딕"/>
               </a:rPr>
@@ -13143,7 +13143,7 @@
             <a:r>
               <a:rPr sz="950" b="0">
                 <a:solidFill>
-                  <a:srgbClr val="1E293B"/>
+                  <a:srgbClr val="0F2942"/>
                 </a:solidFill>
                 <a:latin typeface="맑은 고딕"/>
               </a:rPr>
@@ -13287,7 +13287,7 @@
                 </a:solidFill>
                 <a:latin typeface="맑은 고딕"/>
               </a:rPr>
-              <a:t>PARTNER (실증DB)</a:t>
+              <a:t>PARTNER (시험검증DB)</a:t>
             </a:r>
           </a:p>
         </p:txBody>
@@ -13367,11 +13367,11 @@
             <a:r>
               <a:rPr sz="950" b="0">
                 <a:solidFill>
-                  <a:srgbClr val="1E293B"/>
+                  <a:srgbClr val="0F2942"/>
                 </a:solidFill>
                 <a:latin typeface="맑은 고딕"/>
               </a:rPr>
-              <a:t>■ ProductLab 실증자료 DB 구축 및 연계 전담</a:t>
+              <a:t>■ PLM-Nexus 시험성적서 DB 구축 및 연계 전담</a:t>
             </a:r>
           </a:p>
           <a:p>
@@ -13386,7 +13386,7 @@
             <a:r>
               <a:rPr sz="950" b="0">
                 <a:solidFill>
-                  <a:srgbClr val="1E293B"/>
+                  <a:srgbClr val="0F2942"/>
                 </a:solidFill>
                 <a:latin typeface="맑은 고딕"/>
               </a:rPr>
@@ -13405,11 +13405,11 @@
             <a:r>
               <a:rPr sz="950" b="0">
                 <a:solidFill>
-                  <a:srgbClr val="1E293B"/>
+                  <a:srgbClr val="0F2942"/>
                 </a:solidFill>
                 <a:latin typeface="맑은 고딕"/>
               </a:rPr>
-              <a:t>  - 연구원 ProductLab 시스템 데이터 구조 분석 및 일정 관리</a:t>
+              <a:t>  - 연구원 PLM-Nexus 시스템 데이터 구조 분석 및 일정 관리</a:t>
             </a:r>
           </a:p>
           <a:p>
@@ -13424,7 +13424,7 @@
             <a:r>
               <a:rPr sz="950" b="0">
                 <a:solidFill>
-                  <a:srgbClr val="1E293B"/>
+                  <a:srgbClr val="0F2942"/>
                 </a:solidFill>
                 <a:latin typeface="맑은 고딕"/>
               </a:rPr>
@@ -13443,11 +13443,11 @@
             <a:r>
               <a:rPr sz="950" b="0">
                 <a:solidFill>
-                  <a:srgbClr val="1E293B"/>
+                  <a:srgbClr val="0F2942"/>
                 </a:solidFill>
                 <a:latin typeface="맑은 고딕"/>
               </a:rPr>
-              <a:t>  - 원료·처방·효능·인체적용시험 실증 메타데이터 추출/적재</a:t>
+              <a:t>  - 원소재·설계사양·성능규격·공인신뢰성시험 시험검증 메타데이터 추출/적재</a:t>
             </a:r>
           </a:p>
           <a:p>
@@ -13462,11 +13462,11 @@
             <a:r>
               <a:rPr sz="950" b="0">
                 <a:solidFill>
-                  <a:srgbClr val="1E293B"/>
+                  <a:srgbClr val="0F2942"/>
                 </a:solidFill>
                 <a:latin typeface="맑은 고딕"/>
               </a:rPr>
-              <a:t>  - SyncGuard AI ↔ ProductLab 간 REST API / 배치 연동 개발</a:t>
+              <a:t>  - SyncFlow AI ↔ PLM-Nexus 간 REST API / 배치 연동 개발</a:t>
             </a:r>
           </a:p>
           <a:p>
@@ -13481,7 +13481,7 @@
             <a:r>
               <a:rPr sz="950" b="0">
                 <a:solidFill>
-                  <a:srgbClr val="1E293B"/>
+                  <a:srgbClr val="0F2942"/>
                 </a:solidFill>
                 <a:latin typeface="맑은 고딕"/>
               </a:rPr>
@@ -13500,7 +13500,7 @@
             <a:r>
               <a:rPr sz="950" b="0">
                 <a:solidFill>
-                  <a:srgbClr val="1E293B"/>
+                  <a:srgbClr val="0F2942"/>
                 </a:solidFill>
                 <a:latin typeface="맑은 고딕"/>
               </a:rPr>
@@ -13519,7 +13519,7 @@
             <a:r>
               <a:rPr sz="950" b="0">
                 <a:solidFill>
-                  <a:srgbClr val="1E293B"/>
+                  <a:srgbClr val="0F2942"/>
                 </a:solidFill>
                 <a:latin typeface="맑은 고딕"/>
               </a:rPr>
@@ -13538,7 +13538,7 @@
             <a:r>
               <a:rPr sz="950" b="0">
                 <a:solidFill>
-                  <a:srgbClr val="1E293B"/>
+                  <a:srgbClr val="0F2942"/>
                 </a:solidFill>
                 <a:latin typeface="맑은 고딕"/>
               </a:rPr>
@@ -13557,11 +13557,11 @@
             <a:r>
               <a:rPr sz="950" b="0">
                 <a:solidFill>
-                  <a:srgbClr val="1E293B"/>
+                  <a:srgbClr val="0F2942"/>
                 </a:solidFill>
                 <a:latin typeface="맑은 고딕"/>
               </a:rPr>
-              <a:t>• ProductLab 연계 협의 회의 시 발주사 기술원/ERP팀과 합동 참석</a:t>
+              <a:t>• PLM-Nexus 연계 협의 회의 시 발주사 기술원/ERP팀과 합동 참석</a:t>
             </a:r>
           </a:p>
         </p:txBody>
@@ -14005,7 +14005,7 @@
                 </a:solidFill>
                 <a:latin typeface="맑은 고딕"/>
               </a:rPr>
-              <a:t>한빛글로벌 SyncGuard AI 시스템 구축  |  보고체계 관리 계획서</a:t>
+              <a:t>한빛글로벌 SyncFlow AI 시스템 구축  |  보고체계 관리 계획서</a:t>
             </a:r>
           </a:p>
         </p:txBody>
@@ -14490,7 +14490,7 @@
                       <a:r>
                         <a:rPr sz="880" b="1">
                           <a:solidFill>
-                            <a:srgbClr val="1E293B"/>
+                            <a:srgbClr val="0F2942"/>
                           </a:solidFill>
                           <a:latin typeface="맑은 고딕"/>
                         </a:rPr>
@@ -14540,7 +14540,7 @@
                       <a:r>
                         <a:rPr sz="880" b="1">
                           <a:solidFill>
-                            <a:srgbClr val="1E293B"/>
+                            <a:srgbClr val="0F2942"/>
                           </a:solidFill>
                           <a:latin typeface="맑은 고딕"/>
                         </a:rPr>
@@ -14590,7 +14590,7 @@
                       <a:r>
                         <a:rPr sz="880" b="0">
                           <a:solidFill>
-                            <a:srgbClr val="1E293B"/>
+                            <a:srgbClr val="0F2942"/>
                           </a:solidFill>
                           <a:latin typeface="맑은 고딕"/>
                         </a:rPr>
@@ -14640,7 +14640,7 @@
                       <a:r>
                         <a:rPr sz="880" b="0">
                           <a:solidFill>
-                            <a:srgbClr val="1E293B"/>
+                            <a:srgbClr val="0F2942"/>
                           </a:solidFill>
                           <a:latin typeface="맑은 고딕"/>
                         </a:rPr>
@@ -14690,7 +14690,7 @@
                       <a:r>
                         <a:rPr sz="880" b="0">
                           <a:solidFill>
-                            <a:srgbClr val="1E293B"/>
+                            <a:srgbClr val="0F2942"/>
                           </a:solidFill>
                           <a:latin typeface="맑은 고딕"/>
                         </a:rPr>
@@ -14740,7 +14740,7 @@
                       <a:r>
                         <a:rPr sz="880" b="0">
                           <a:solidFill>
-                            <a:srgbClr val="1E293B"/>
+                            <a:srgbClr val="0F2942"/>
                           </a:solidFill>
                           <a:latin typeface="맑은 고딕"/>
                         </a:rPr>
@@ -14790,7 +14790,7 @@
                       <a:r>
                         <a:rPr sz="880" b="0">
                           <a:solidFill>
-                            <a:srgbClr val="1E293B"/>
+                            <a:srgbClr val="0F2942"/>
                           </a:solidFill>
                           <a:latin typeface="맑은 고딕"/>
                         </a:rPr>
@@ -14842,7 +14842,7 @@
                       <a:r>
                         <a:rPr sz="880" b="1">
                           <a:solidFill>
-                            <a:srgbClr val="1E293B"/>
+                            <a:srgbClr val="0F2942"/>
                           </a:solidFill>
                           <a:latin typeface="맑은 고딕"/>
                         </a:rPr>
@@ -14892,7 +14892,7 @@
                       <a:r>
                         <a:rPr sz="880" b="1">
                           <a:solidFill>
-                            <a:srgbClr val="1E293B"/>
+                            <a:srgbClr val="0F2942"/>
                           </a:solidFill>
                           <a:latin typeface="맑은 고딕"/>
                         </a:rPr>
@@ -14942,7 +14942,7 @@
                       <a:r>
                         <a:rPr sz="880" b="0">
                           <a:solidFill>
-                            <a:srgbClr val="1E293B"/>
+                            <a:srgbClr val="0F2942"/>
                           </a:solidFill>
                           <a:latin typeface="맑은 고딕"/>
                         </a:rPr>
@@ -14992,7 +14992,7 @@
                       <a:r>
                         <a:rPr sz="880" b="0">
                           <a:solidFill>
-                            <a:srgbClr val="1E293B"/>
+                            <a:srgbClr val="0F2942"/>
                           </a:solidFill>
                           <a:latin typeface="맑은 고딕"/>
                         </a:rPr>
@@ -15042,7 +15042,7 @@
                       <a:r>
                         <a:rPr sz="880" b="0">
                           <a:solidFill>
-                            <a:srgbClr val="1E293B"/>
+                            <a:srgbClr val="0F2942"/>
                           </a:solidFill>
                           <a:latin typeface="맑은 고딕"/>
                         </a:rPr>
@@ -15092,7 +15092,7 @@
                       <a:r>
                         <a:rPr sz="880" b="0">
                           <a:solidFill>
-                            <a:srgbClr val="1E293B"/>
+                            <a:srgbClr val="0F2942"/>
                           </a:solidFill>
                           <a:latin typeface="맑은 고딕"/>
                         </a:rPr>
@@ -15142,7 +15142,7 @@
                       <a:r>
                         <a:rPr sz="880" b="0">
                           <a:solidFill>
-                            <a:srgbClr val="1E293B"/>
+                            <a:srgbClr val="0F2942"/>
                           </a:solidFill>
                           <a:latin typeface="맑은 고딕"/>
                         </a:rPr>
@@ -15194,7 +15194,7 @@
                       <a:r>
                         <a:rPr sz="880" b="1">
                           <a:solidFill>
-                            <a:srgbClr val="1E293B"/>
+                            <a:srgbClr val="0F2942"/>
                           </a:solidFill>
                           <a:latin typeface="맑은 고딕"/>
                         </a:rPr>
@@ -15244,7 +15244,7 @@
                       <a:r>
                         <a:rPr sz="880" b="1">
                           <a:solidFill>
-                            <a:srgbClr val="1E293B"/>
+                            <a:srgbClr val="0F2942"/>
                           </a:solidFill>
                           <a:latin typeface="맑은 고딕"/>
                         </a:rPr>
@@ -15294,7 +15294,7 @@
                       <a:r>
                         <a:rPr sz="880" b="0">
                           <a:solidFill>
-                            <a:srgbClr val="1E293B"/>
+                            <a:srgbClr val="0F2942"/>
                           </a:solidFill>
                           <a:latin typeface="맑은 고딕"/>
                         </a:rPr>
@@ -15344,7 +15344,7 @@
                       <a:r>
                         <a:rPr sz="880" b="0">
                           <a:solidFill>
-                            <a:srgbClr val="1E293B"/>
+                            <a:srgbClr val="0F2942"/>
                           </a:solidFill>
                           <a:latin typeface="맑은 고딕"/>
                         </a:rPr>
@@ -15394,7 +15394,7 @@
                       <a:r>
                         <a:rPr sz="880" b="0">
                           <a:solidFill>
-                            <a:srgbClr val="1E293B"/>
+                            <a:srgbClr val="0F2942"/>
                           </a:solidFill>
                           <a:latin typeface="맑은 고딕"/>
                         </a:rPr>
@@ -15444,7 +15444,7 @@
                       <a:r>
                         <a:rPr sz="880" b="0">
                           <a:solidFill>
-                            <a:srgbClr val="1E293B"/>
+                            <a:srgbClr val="0F2942"/>
                           </a:solidFill>
                           <a:latin typeface="맑은 고딕"/>
                         </a:rPr>
@@ -15494,7 +15494,7 @@
                       <a:r>
                         <a:rPr sz="880" b="0">
                           <a:solidFill>
-                            <a:srgbClr val="1E293B"/>
+                            <a:srgbClr val="0F2942"/>
                           </a:solidFill>
                           <a:latin typeface="맑은 고딕"/>
                         </a:rPr>
@@ -15546,7 +15546,7 @@
                       <a:r>
                         <a:rPr sz="880" b="1">
                           <a:solidFill>
-                            <a:srgbClr val="1E293B"/>
+                            <a:srgbClr val="0F2942"/>
                           </a:solidFill>
                           <a:latin typeface="맑은 고딕"/>
                         </a:rPr>
@@ -15596,7 +15596,7 @@
                       <a:r>
                         <a:rPr sz="880" b="1">
                           <a:solidFill>
-                            <a:srgbClr val="1E293B"/>
+                            <a:srgbClr val="0F2942"/>
                           </a:solidFill>
                           <a:latin typeface="맑은 고딕"/>
                         </a:rPr>
@@ -15646,7 +15646,7 @@
                       <a:r>
                         <a:rPr sz="880" b="0">
                           <a:solidFill>
-                            <a:srgbClr val="1E293B"/>
+                            <a:srgbClr val="0F2942"/>
                           </a:solidFill>
                           <a:latin typeface="맑은 고딕"/>
                         </a:rPr>
@@ -15696,7 +15696,7 @@
                       <a:r>
                         <a:rPr sz="880" b="0">
                           <a:solidFill>
-                            <a:srgbClr val="1E293B"/>
+                            <a:srgbClr val="0F2942"/>
                           </a:solidFill>
                           <a:latin typeface="맑은 고딕"/>
                         </a:rPr>
@@ -15746,11 +15746,11 @@
                       <a:r>
                         <a:rPr sz="880" b="0">
                           <a:solidFill>
-                            <a:srgbClr val="1E293B"/>
+                            <a:srgbClr val="0F2942"/>
                           </a:solidFill>
                           <a:latin typeface="맑은 고딕"/>
                         </a:rPr>
-                        <a:t>발주사 스폰서, PM, RA Lab</a:t>
+                        <a:t>발주사 스폰서, PM, 품질법무검증팀</a:t>
                       </a:r>
                     </a:p>
                   </a:txBody>
@@ -15796,7 +15796,7 @@
                       <a:r>
                         <a:rPr sz="880" b="0">
                           <a:solidFill>
-                            <a:srgbClr val="1E293B"/>
+                            <a:srgbClr val="0F2942"/>
                           </a:solidFill>
                           <a:latin typeface="맑은 고딕"/>
                         </a:rPr>
@@ -15846,7 +15846,7 @@
                       <a:r>
                         <a:rPr sz="880" b="0">
                           <a:solidFill>
-                            <a:srgbClr val="1E293B"/>
+                            <a:srgbClr val="0F2942"/>
                           </a:solidFill>
                           <a:latin typeface="맑은 고딕"/>
                         </a:rPr>
@@ -15898,7 +15898,7 @@
                       <a:r>
                         <a:rPr sz="880" b="1">
                           <a:solidFill>
-                            <a:srgbClr val="1E293B"/>
+                            <a:srgbClr val="0F2942"/>
                           </a:solidFill>
                           <a:latin typeface="맑은 고딕"/>
                         </a:rPr>
@@ -15948,7 +15948,7 @@
                       <a:r>
                         <a:rPr sz="880" b="1">
                           <a:solidFill>
-                            <a:srgbClr val="1E293B"/>
+                            <a:srgbClr val="0F2942"/>
                           </a:solidFill>
                           <a:latin typeface="맑은 고딕"/>
                         </a:rPr>
@@ -15998,7 +15998,7 @@
                       <a:r>
                         <a:rPr sz="880" b="0">
                           <a:solidFill>
-                            <a:srgbClr val="1E293B"/>
+                            <a:srgbClr val="0F2942"/>
                           </a:solidFill>
                           <a:latin typeface="맑은 고딕"/>
                         </a:rPr>
@@ -16048,7 +16048,7 @@
                       <a:r>
                         <a:rPr sz="880" b="0">
                           <a:solidFill>
-                            <a:srgbClr val="1E293B"/>
+                            <a:srgbClr val="0F2942"/>
                           </a:solidFill>
                           <a:latin typeface="맑은 고딕"/>
                         </a:rPr>
@@ -16098,11 +16098,11 @@
                       <a:r>
                         <a:rPr sz="880" b="0">
                           <a:solidFill>
-                            <a:srgbClr val="1E293B"/>
+                            <a:srgbClr val="0F2942"/>
                           </a:solidFill>
                           <a:latin typeface="맑은 고딕"/>
                         </a:rPr>
-                        <a:t>발주사 PM, RA Lab, IT팀</a:t>
+                        <a:t>발주사 PM, 품질법무검증팀, IT팀</a:t>
                       </a:r>
                     </a:p>
                   </a:txBody>
@@ -16148,7 +16148,7 @@
                       <a:r>
                         <a:rPr sz="880" b="0">
                           <a:solidFill>
-                            <a:srgbClr val="1E293B"/>
+                            <a:srgbClr val="0F2942"/>
                           </a:solidFill>
                           <a:latin typeface="맑은 고딕"/>
                         </a:rPr>
@@ -16198,7 +16198,7 @@
                       <a:r>
                         <a:rPr sz="880" b="0">
                           <a:solidFill>
-                            <a:srgbClr val="1E293B"/>
+                            <a:srgbClr val="0F2942"/>
                           </a:solidFill>
                           <a:latin typeface="맑은 고딕"/>
                         </a:rPr>
@@ -16250,7 +16250,7 @@
                       <a:r>
                         <a:rPr sz="880" b="1">
                           <a:solidFill>
-                            <a:srgbClr val="1E293B"/>
+                            <a:srgbClr val="0F2942"/>
                           </a:solidFill>
                           <a:latin typeface="맑은 고딕"/>
                         </a:rPr>
@@ -16300,7 +16300,7 @@
                       <a:r>
                         <a:rPr sz="880" b="1">
                           <a:solidFill>
-                            <a:srgbClr val="1E293B"/>
+                            <a:srgbClr val="0F2942"/>
                           </a:solidFill>
                           <a:latin typeface="맑은 고딕"/>
                         </a:rPr>
@@ -16350,7 +16350,7 @@
                       <a:r>
                         <a:rPr sz="880" b="0">
                           <a:solidFill>
-                            <a:srgbClr val="1E293B"/>
+                            <a:srgbClr val="0F2942"/>
                           </a:solidFill>
                           <a:latin typeface="맑은 고딕"/>
                         </a:rPr>
@@ -16400,7 +16400,7 @@
                       <a:r>
                         <a:rPr sz="880" b="0">
                           <a:solidFill>
-                            <a:srgbClr val="1E293B"/>
+                            <a:srgbClr val="0F2942"/>
                           </a:solidFill>
                           <a:latin typeface="맑은 고딕"/>
                         </a:rPr>
@@ -16450,11 +16450,11 @@
                       <a:r>
                         <a:rPr sz="880" b="0">
                           <a:solidFill>
-                            <a:srgbClr val="1E293B"/>
+                            <a:srgbClr val="0F2942"/>
                           </a:solidFill>
                           <a:latin typeface="맑은 고딕"/>
                         </a:rPr>
-                        <a:t>발주사 PM, RA Lab, 데이터브릿지</a:t>
+                        <a:t>발주사 PM, 품질법무검증팀, 데이터브릿지</a:t>
                       </a:r>
                     </a:p>
                   </a:txBody>
@@ -16500,7 +16500,7 @@
                       <a:r>
                         <a:rPr sz="880" b="0">
                           <a:solidFill>
-                            <a:srgbClr val="1E293B"/>
+                            <a:srgbClr val="0F2942"/>
                           </a:solidFill>
                           <a:latin typeface="맑은 고딕"/>
                         </a:rPr>
@@ -16550,11 +16550,11 @@
                       <a:r>
                         <a:rPr sz="880" b="0">
                           <a:solidFill>
-                            <a:srgbClr val="1E293B"/>
+                            <a:srgbClr val="0F2942"/>
                           </a:solidFill>
                           <a:latin typeface="맑은 고딕"/>
                         </a:rPr>
-                        <a:t>3단계 AI 판정 엔진 프로토타입 시연, 100대 규칙사전 및 ProductLab 실증DB 연동 검증</a:t>
+                        <a:t>3단계 AI 판정 엔진 프로토타입 시연, 100대 규칙사전 및 PLM-Nexus 시험검증DB 연동 검증</a:t>
                       </a:r>
                     </a:p>
                   </a:txBody>
@@ -16602,7 +16602,7 @@
                       <a:r>
                         <a:rPr sz="880" b="1">
                           <a:solidFill>
-                            <a:srgbClr val="1E293B"/>
+                            <a:srgbClr val="0F2942"/>
                           </a:solidFill>
                           <a:latin typeface="맑은 고딕"/>
                         </a:rPr>
@@ -16652,7 +16652,7 @@
                       <a:r>
                         <a:rPr sz="880" b="1">
                           <a:solidFill>
-                            <a:srgbClr val="1E293B"/>
+                            <a:srgbClr val="0F2942"/>
                           </a:solidFill>
                           <a:latin typeface="맑은 고딕"/>
                         </a:rPr>
@@ -16702,7 +16702,7 @@
                       <a:r>
                         <a:rPr sz="880" b="0">
                           <a:solidFill>
-                            <a:srgbClr val="1E293B"/>
+                            <a:srgbClr val="0F2942"/>
                           </a:solidFill>
                           <a:latin typeface="맑은 고딕"/>
                         </a:rPr>
@@ -16752,7 +16752,7 @@
                       <a:r>
                         <a:rPr sz="880" b="0">
                           <a:solidFill>
-                            <a:srgbClr val="1E293B"/>
+                            <a:srgbClr val="0F2942"/>
                           </a:solidFill>
                           <a:latin typeface="맑은 고딕"/>
                         </a:rPr>
@@ -16802,11 +16802,11 @@
                       <a:r>
                         <a:rPr sz="880" b="0">
                           <a:solidFill>
-                            <a:srgbClr val="1E293B"/>
+                            <a:srgbClr val="0F2942"/>
                           </a:solidFill>
                           <a:latin typeface="맑은 고딕"/>
                         </a:rPr>
-                        <a:t>발주사 PM, RA Lab, 보안팀</a:t>
+                        <a:t>발주사 PM, 품질법무검증팀, 보안팀</a:t>
                       </a:r>
                     </a:p>
                   </a:txBody>
@@ -16852,7 +16852,7 @@
                       <a:r>
                         <a:rPr sz="880" b="0">
                           <a:solidFill>
-                            <a:srgbClr val="1E293B"/>
+                            <a:srgbClr val="0F2942"/>
                           </a:solidFill>
                           <a:latin typeface="맑은 고딕"/>
                         </a:rPr>
@@ -16902,7 +16902,7 @@
                       <a:r>
                         <a:rPr sz="880" b="0">
                           <a:solidFill>
-                            <a:srgbClr val="1E293B"/>
+                            <a:srgbClr val="0F2942"/>
                           </a:solidFill>
                           <a:latin typeface="맑은 고딕"/>
                         </a:rPr>
@@ -16954,7 +16954,7 @@
                       <a:r>
                         <a:rPr sz="880" b="1">
                           <a:solidFill>
-                            <a:srgbClr val="1E293B"/>
+                            <a:srgbClr val="0F2942"/>
                           </a:solidFill>
                           <a:latin typeface="맑은 고딕"/>
                         </a:rPr>
@@ -17004,7 +17004,7 @@
                       <a:r>
                         <a:rPr sz="880" b="1">
                           <a:solidFill>
-                            <a:srgbClr val="1E293B"/>
+                            <a:srgbClr val="0F2942"/>
                           </a:solidFill>
                           <a:latin typeface="맑은 고딕"/>
                         </a:rPr>
@@ -17054,7 +17054,7 @@
                       <a:r>
                         <a:rPr sz="880" b="0">
                           <a:solidFill>
-                            <a:srgbClr val="1E293B"/>
+                            <a:srgbClr val="0F2942"/>
                           </a:solidFill>
                           <a:latin typeface="맑은 고딕"/>
                         </a:rPr>
@@ -17104,7 +17104,7 @@
                       <a:r>
                         <a:rPr sz="880" b="0">
                           <a:solidFill>
-                            <a:srgbClr val="1E293B"/>
+                            <a:srgbClr val="0F2942"/>
                           </a:solidFill>
                           <a:latin typeface="맑은 고딕"/>
                         </a:rPr>
@@ -17154,7 +17154,7 @@
                       <a:r>
                         <a:rPr sz="880" b="0">
                           <a:solidFill>
-                            <a:srgbClr val="1E293B"/>
+                            <a:srgbClr val="0F2942"/>
                           </a:solidFill>
                           <a:latin typeface="맑은 고딕"/>
                         </a:rPr>
@@ -17204,7 +17204,7 @@
                       <a:r>
                         <a:rPr sz="880" b="0">
                           <a:solidFill>
-                            <a:srgbClr val="1E293B"/>
+                            <a:srgbClr val="0F2942"/>
                           </a:solidFill>
                           <a:latin typeface="맑은 고딕"/>
                         </a:rPr>
@@ -17254,7 +17254,7 @@
                       <a:r>
                         <a:rPr sz="880" b="0">
                           <a:solidFill>
-                            <a:srgbClr val="1E293B"/>
+                            <a:srgbClr val="0F2942"/>
                           </a:solidFill>
                           <a:latin typeface="맑은 고딕"/>
                         </a:rPr>
@@ -17306,7 +17306,7 @@
                       <a:r>
                         <a:rPr sz="880" b="1">
                           <a:solidFill>
-                            <a:srgbClr val="1E293B"/>
+                            <a:srgbClr val="0F2942"/>
                           </a:solidFill>
                           <a:latin typeface="맑은 고딕"/>
                         </a:rPr>
@@ -17356,7 +17356,7 @@
                       <a:r>
                         <a:rPr sz="880" b="1">
                           <a:solidFill>
-                            <a:srgbClr val="1E293B"/>
+                            <a:srgbClr val="0F2942"/>
                           </a:solidFill>
                           <a:latin typeface="맑은 고딕"/>
                         </a:rPr>
@@ -17406,7 +17406,7 @@
                       <a:r>
                         <a:rPr sz="880" b="0">
                           <a:solidFill>
-                            <a:srgbClr val="1E293B"/>
+                            <a:srgbClr val="0F2942"/>
                           </a:solidFill>
                           <a:latin typeface="맑은 고딕"/>
                         </a:rPr>
@@ -17456,7 +17456,7 @@
                       <a:r>
                         <a:rPr sz="880" b="0">
                           <a:solidFill>
-                            <a:srgbClr val="1E293B"/>
+                            <a:srgbClr val="0F2942"/>
                           </a:solidFill>
                           <a:latin typeface="맑은 고딕"/>
                         </a:rPr>
@@ -17506,7 +17506,7 @@
                       <a:r>
                         <a:rPr sz="880" b="0">
                           <a:solidFill>
-                            <a:srgbClr val="1E293B"/>
+                            <a:srgbClr val="0F2942"/>
                           </a:solidFill>
                           <a:latin typeface="맑은 고딕"/>
                         </a:rPr>
@@ -17556,7 +17556,7 @@
                       <a:r>
                         <a:rPr sz="880" b="0">
                           <a:solidFill>
-                            <a:srgbClr val="1E293B"/>
+                            <a:srgbClr val="0F2942"/>
                           </a:solidFill>
                           <a:latin typeface="맑은 고딕"/>
                         </a:rPr>
@@ -17606,7 +17606,7 @@
                       <a:r>
                         <a:rPr sz="880" b="0">
                           <a:solidFill>
-                            <a:srgbClr val="1E293B"/>
+                            <a:srgbClr val="0F2942"/>
                           </a:solidFill>
                           <a:latin typeface="맑은 고딕"/>
                         </a:rPr>
@@ -17954,7 +17954,7 @@
                 </a:solidFill>
                 <a:latin typeface="맑은 고딕"/>
               </a:rPr>
-              <a:t>한빛글로벌 SyncGuard AI 시스템 구축  |  보고체계 관리 계획서</a:t>
+              <a:t>한빛글로벌 SyncFlow AI 시스템 구축  |  보고체계 관리 계획서</a:t>
             </a:r>
           </a:p>
         </p:txBody>
@@ -18388,7 +18388,7 @@
                       <a:r>
                         <a:rPr sz="900" b="1">
                           <a:solidFill>
-                            <a:srgbClr val="1E293B"/>
+                            <a:srgbClr val="0F2942"/>
                           </a:solidFill>
                           <a:latin typeface="맑은 고딕"/>
                         </a:rPr>
@@ -18438,7 +18438,7 @@
                       <a:r>
                         <a:rPr sz="900" b="0">
                           <a:solidFill>
-                            <a:srgbClr val="1E293B"/>
+                            <a:srgbClr val="0F2942"/>
                           </a:solidFill>
                           <a:latin typeface="맑은 고딕"/>
                         </a:rPr>
@@ -18488,7 +18488,7 @@
                       <a:r>
                         <a:rPr sz="900" b="0">
                           <a:solidFill>
-                            <a:srgbClr val="1E293B"/>
+                            <a:srgbClr val="0F2942"/>
                           </a:solidFill>
                           <a:latin typeface="맑은 고딕"/>
                         </a:rPr>
@@ -18507,7 +18507,7 @@
                       <a:r>
                         <a:rPr sz="900" b="0">
                           <a:solidFill>
-                            <a:srgbClr val="1E293B"/>
+                            <a:srgbClr val="0F2942"/>
                           </a:solidFill>
                           <a:latin typeface="맑은 고딕"/>
                         </a:rPr>
@@ -18557,7 +18557,7 @@
                       <a:r>
                         <a:rPr sz="900" b="0">
                           <a:solidFill>
-                            <a:srgbClr val="1E293B"/>
+                            <a:srgbClr val="0F2942"/>
                           </a:solidFill>
                           <a:latin typeface="맑은 고딕"/>
                         </a:rPr>
@@ -18576,7 +18576,7 @@
                       <a:r>
                         <a:rPr sz="900" b="0">
                           <a:solidFill>
-                            <a:srgbClr val="1E293B"/>
+                            <a:srgbClr val="0F2942"/>
                           </a:solidFill>
                           <a:latin typeface="맑은 고딕"/>
                         </a:rPr>
@@ -18626,7 +18626,7 @@
                       <a:r>
                         <a:rPr sz="900" b="0">
                           <a:solidFill>
-                            <a:srgbClr val="1E293B"/>
+                            <a:srgbClr val="0F2942"/>
                           </a:solidFill>
                           <a:latin typeface="맑은 고딕"/>
                         </a:rPr>
@@ -18645,7 +18645,7 @@
                       <a:r>
                         <a:rPr sz="900" b="0">
                           <a:solidFill>
-                            <a:srgbClr val="1E293B"/>
+                            <a:srgbClr val="0F2942"/>
                           </a:solidFill>
                           <a:latin typeface="맑은 고딕"/>
                         </a:rPr>
@@ -18695,7 +18695,7 @@
                       <a:r>
                         <a:rPr sz="900" b="0">
                           <a:solidFill>
-                            <a:srgbClr val="1E293B"/>
+                            <a:srgbClr val="0F2942"/>
                           </a:solidFill>
                           <a:latin typeface="맑은 고딕"/>
                         </a:rPr>
@@ -18714,7 +18714,7 @@
                       <a:r>
                         <a:rPr sz="900" b="0">
                           <a:solidFill>
-                            <a:srgbClr val="1E293B"/>
+                            <a:srgbClr val="0F2942"/>
                           </a:solidFill>
                           <a:latin typeface="맑은 고딕"/>
                         </a:rPr>
@@ -18766,7 +18766,7 @@
                       <a:r>
                         <a:rPr sz="900" b="1">
                           <a:solidFill>
-                            <a:srgbClr val="1E293B"/>
+                            <a:srgbClr val="0F2942"/>
                           </a:solidFill>
                           <a:latin typeface="맑은 고딕"/>
                         </a:rPr>
@@ -18816,7 +18816,7 @@
                       <a:r>
                         <a:rPr sz="900" b="0">
                           <a:solidFill>
-                            <a:srgbClr val="1E293B"/>
+                            <a:srgbClr val="0F2942"/>
                           </a:solidFill>
                           <a:latin typeface="맑은 고딕"/>
                         </a:rPr>
@@ -18835,7 +18835,7 @@
                       <a:r>
                         <a:rPr sz="900" b="0">
                           <a:solidFill>
-                            <a:srgbClr val="1E293B"/>
+                            <a:srgbClr val="0F2942"/>
                           </a:solidFill>
                           <a:latin typeface="맑은 고딕"/>
                         </a:rPr>
@@ -18885,7 +18885,7 @@
                       <a:r>
                         <a:rPr sz="900" b="0">
                           <a:solidFill>
-                            <a:srgbClr val="1E293B"/>
+                            <a:srgbClr val="0F2942"/>
                           </a:solidFill>
                           <a:latin typeface="맑은 고딕"/>
                         </a:rPr>
@@ -18904,7 +18904,7 @@
                       <a:r>
                         <a:rPr sz="900" b="0">
                           <a:solidFill>
-                            <a:srgbClr val="1E293B"/>
+                            <a:srgbClr val="0F2942"/>
                           </a:solidFill>
                           <a:latin typeface="맑은 고딕"/>
                         </a:rPr>
@@ -18954,11 +18954,11 @@
                       <a:r>
                         <a:rPr sz="900" b="0">
                           <a:solidFill>
-                            <a:srgbClr val="1E293B"/>
+                            <a:srgbClr val="0F2942"/>
                           </a:solidFill>
                           <a:latin typeface="맑은 고딕"/>
                         </a:rPr>
-                        <a:t>현업 PM(정민수), RA Lab 4인,</a:t>
+                        <a:t>현업 PM(정민수), 품질법무검증팀 4인,</a:t>
                       </a:r>
                     </a:p>
                     <a:p>
@@ -18973,7 +18973,7 @@
                       <a:r>
                         <a:rPr sz="900" b="0">
                           <a:solidFill>
-                            <a:srgbClr val="1E293B"/>
+                            <a:srgbClr val="0F2942"/>
                           </a:solidFill>
                           <a:latin typeface="맑은 고딕"/>
                         </a:rPr>
@@ -19023,11 +19023,11 @@
                       <a:r>
                         <a:rPr sz="900" b="0">
                           <a:solidFill>
-                            <a:srgbClr val="1E293B"/>
+                            <a:srgbClr val="0F2942"/>
                           </a:solidFill>
                           <a:latin typeface="맑은 고딕"/>
                         </a:rPr>
-                        <a:t>• 현행 클레임 검토 Pain-Point 및 TO-BE 프로세스 합의</a:t>
+                        <a:t>• 현행 규격·계약 검토 Pain-Point 및 TO-BE 프로세스 합의</a:t>
                       </a:r>
                     </a:p>
                     <a:p>
@@ -19042,7 +19042,7 @@
                       <a:r>
                         <a:rPr sz="900" b="0">
                           <a:solidFill>
-                            <a:srgbClr val="1E293B"/>
+                            <a:srgbClr val="0F2942"/>
                           </a:solidFill>
                           <a:latin typeface="맑은 고딕"/>
                         </a:rPr>
@@ -19092,7 +19092,7 @@
                       <a:r>
                         <a:rPr sz="900" b="0">
                           <a:solidFill>
-                            <a:srgbClr val="1E293B"/>
+                            <a:srgbClr val="0F2942"/>
                           </a:solidFill>
                           <a:latin typeface="맑은 고딕"/>
                         </a:rPr>
@@ -19111,7 +19111,7 @@
                       <a:r>
                         <a:rPr sz="900" b="0">
                           <a:solidFill>
-                            <a:srgbClr val="1E293B"/>
+                            <a:srgbClr val="0F2942"/>
                           </a:solidFill>
                           <a:latin typeface="맑은 고딕"/>
                         </a:rPr>
@@ -19163,7 +19163,7 @@
                       <a:r>
                         <a:rPr sz="900" b="1">
                           <a:solidFill>
-                            <a:srgbClr val="1E293B"/>
+                            <a:srgbClr val="0F2942"/>
                           </a:solidFill>
                           <a:latin typeface="맑은 고딕"/>
                         </a:rPr>
@@ -19213,7 +19213,7 @@
                       <a:r>
                         <a:rPr sz="900" b="0">
                           <a:solidFill>
-                            <a:srgbClr val="1E293B"/>
+                            <a:srgbClr val="0F2942"/>
                           </a:solidFill>
                           <a:latin typeface="맑은 고딕"/>
                         </a:rPr>
@@ -19232,7 +19232,7 @@
                       <a:r>
                         <a:rPr sz="900" b="0">
                           <a:solidFill>
-                            <a:srgbClr val="1E293B"/>
+                            <a:srgbClr val="0F2942"/>
                           </a:solidFill>
                           <a:latin typeface="맑은 고딕"/>
                         </a:rPr>
@@ -19282,7 +19282,7 @@
                       <a:r>
                         <a:rPr sz="900" b="0">
                           <a:solidFill>
-                            <a:srgbClr val="1E293B"/>
+                            <a:srgbClr val="0F2942"/>
                           </a:solidFill>
                           <a:latin typeface="맑은 고딕"/>
                         </a:rPr>
@@ -19332,7 +19332,7 @@
                       <a:r>
                         <a:rPr sz="900" b="0">
                           <a:solidFill>
-                            <a:srgbClr val="1E293B"/>
+                            <a:srgbClr val="0F2942"/>
                           </a:solidFill>
                           <a:latin typeface="맑은 고딕"/>
                         </a:rPr>
@@ -19351,7 +19351,7 @@
                       <a:r>
                         <a:rPr sz="900" b="0">
                           <a:solidFill>
-                            <a:srgbClr val="1E293B"/>
+                            <a:srgbClr val="0F2942"/>
                           </a:solidFill>
                           <a:latin typeface="맑은 고딕"/>
                         </a:rPr>
@@ -19401,7 +19401,7 @@
                       <a:r>
                         <a:rPr sz="900" b="0">
                           <a:solidFill>
-                            <a:srgbClr val="1E293B"/>
+                            <a:srgbClr val="0F2942"/>
                           </a:solidFill>
                           <a:latin typeface="맑은 고딕"/>
                         </a:rPr>
@@ -19420,11 +19420,11 @@
                       <a:r>
                         <a:rPr sz="900" b="0">
                           <a:solidFill>
-                            <a:srgbClr val="1E293B"/>
+                            <a:srgbClr val="0F2942"/>
                           </a:solidFill>
                           <a:latin typeface="맑은 고딕"/>
                         </a:rPr>
-                        <a:t>• HB-SSO SSO, MarketingHub, ProductLab API 규격 확정</a:t>
+                        <a:t>• HB-SSO SSO, SRM-Portal, PLM-Nexus API 규격 확정</a:t>
                       </a:r>
                     </a:p>
                   </a:txBody>
@@ -19470,7 +19470,7 @@
                       <a:r>
                         <a:rPr sz="900" b="0">
                           <a:solidFill>
-                            <a:srgbClr val="1E293B"/>
+                            <a:srgbClr val="0F2942"/>
                           </a:solidFill>
                           <a:latin typeface="맑은 고딕"/>
                         </a:rPr>
@@ -19489,7 +19489,7 @@
                       <a:r>
                         <a:rPr sz="900" b="0">
                           <a:solidFill>
-                            <a:srgbClr val="1E293B"/>
+                            <a:srgbClr val="0F2942"/>
                           </a:solidFill>
                           <a:latin typeface="맑은 고딕"/>
                         </a:rPr>
@@ -19541,7 +19541,7 @@
                       <a:r>
                         <a:rPr sz="900" b="1">
                           <a:solidFill>
-                            <a:srgbClr val="1E293B"/>
+                            <a:srgbClr val="0F2942"/>
                           </a:solidFill>
                           <a:latin typeface="맑은 고딕"/>
                         </a:rPr>
@@ -19591,7 +19591,7 @@
                       <a:r>
                         <a:rPr sz="900" b="0">
                           <a:solidFill>
-                            <a:srgbClr val="1E293B"/>
+                            <a:srgbClr val="0F2942"/>
                           </a:solidFill>
                           <a:latin typeface="맑은 고딕"/>
                         </a:rPr>
@@ -19610,7 +19610,7 @@
                       <a:r>
                         <a:rPr sz="900" b="0">
                           <a:solidFill>
-                            <a:srgbClr val="1E293B"/>
+                            <a:srgbClr val="0F2942"/>
                           </a:solidFill>
                           <a:latin typeface="맑은 고딕"/>
                         </a:rPr>
@@ -19660,7 +19660,7 @@
                       <a:r>
                         <a:rPr sz="900" b="0">
                           <a:solidFill>
-                            <a:srgbClr val="1E293B"/>
+                            <a:srgbClr val="0F2942"/>
                           </a:solidFill>
                           <a:latin typeface="맑은 고딕"/>
                         </a:rPr>
@@ -19710,11 +19710,11 @@
                       <a:r>
                         <a:rPr sz="900" b="0">
                           <a:solidFill>
-                            <a:srgbClr val="1E293B"/>
+                            <a:srgbClr val="0F2942"/>
                           </a:solidFill>
                           <a:latin typeface="맑은 고딕"/>
                         </a:rPr>
-                        <a:t>RA Lab 실무진, 현업 PM,</a:t>
+                        <a:t>품질법무검증팀 실무진, 현업 PM,</a:t>
                       </a:r>
                     </a:p>
                     <a:p>
@@ -19729,7 +19729,7 @@
                       <a:r>
                         <a:rPr sz="900" b="0">
                           <a:solidFill>
-                            <a:srgbClr val="1E293B"/>
+                            <a:srgbClr val="0F2942"/>
                           </a:solidFill>
                           <a:latin typeface="맑은 고딕"/>
                         </a:rPr>
@@ -19779,11 +19779,11 @@
                       <a:r>
                         <a:rPr sz="900" b="0">
                           <a:solidFill>
-                            <a:srgbClr val="1E293B"/>
+                            <a:srgbClr val="0F2942"/>
                           </a:solidFill>
                           <a:latin typeface="맑은 고딕"/>
                         </a:rPr>
-                        <a:t>• 100대 규칙사전 및 식약처 가이드라인 RAG 검색 정확도</a:t>
+                        <a:t>• 100대 규칙사전 및 공정위·표준원 가이드라인 RAG 검색 정확도</a:t>
                       </a:r>
                     </a:p>
                     <a:p>
@@ -19798,11 +19798,11 @@
                       <a:r>
                         <a:rPr sz="900" b="0">
                           <a:solidFill>
-                            <a:srgbClr val="1E293B"/>
+                            <a:srgbClr val="0F2942"/>
                           </a:solidFill>
                           <a:latin typeface="맑은 고딕"/>
                         </a:rPr>
-                        <a:t>• LLM 프롬프트 판정 근거 및 대체 문구 현업 수용성 평가</a:t>
+                        <a:t>• LLM 프롬프트 판정 근거 및 대체 조항 현업 수용성 평가</a:t>
                       </a:r>
                     </a:p>
                   </a:txBody>
@@ -19848,7 +19848,7 @@
                       <a:r>
                         <a:rPr sz="900" b="0">
                           <a:solidFill>
-                            <a:srgbClr val="1E293B"/>
+                            <a:srgbClr val="0F2942"/>
                           </a:solidFill>
                           <a:latin typeface="맑은 고딕"/>
                         </a:rPr>
@@ -19867,7 +19867,7 @@
                       <a:r>
                         <a:rPr sz="900" b="0">
                           <a:solidFill>
-                            <a:srgbClr val="1E293B"/>
+                            <a:srgbClr val="0F2942"/>
                           </a:solidFill>
                           <a:latin typeface="맑은 고딕"/>
                         </a:rPr>
@@ -20121,7 +20121,7 @@
             <a:r>
               <a:rPr sz="900" b="0">
                 <a:solidFill>
-                  <a:srgbClr val="1E293B"/>
+                  <a:srgbClr val="0F2942"/>
                 </a:solidFill>
                 <a:latin typeface="맑은 고딕"/>
               </a:rPr>
@@ -20140,7 +20140,7 @@
             <a:r>
               <a:rPr sz="900" b="0">
                 <a:solidFill>
-                  <a:srgbClr val="1E293B"/>
+                  <a:srgbClr val="0F2942"/>
                 </a:solidFill>
                 <a:latin typeface="맑은 고딕"/>
               </a:rPr>
@@ -20364,7 +20364,7 @@
             <a:r>
               <a:rPr sz="900" b="0">
                 <a:solidFill>
-                  <a:srgbClr val="1E293B"/>
+                  <a:srgbClr val="0F2942"/>
                 </a:solidFill>
                 <a:latin typeface="맑은 고딕"/>
               </a:rPr>
@@ -20383,7 +20383,7 @@
             <a:r>
               <a:rPr sz="900" b="0">
                 <a:solidFill>
-                  <a:srgbClr val="1E293B"/>
+                  <a:srgbClr val="0F2942"/>
                 </a:solidFill>
                 <a:latin typeface="맑은 고딕"/>
               </a:rPr>
@@ -20607,7 +20607,7 @@
             <a:r>
               <a:rPr sz="900" b="0">
                 <a:solidFill>
-                  <a:srgbClr val="1E293B"/>
+                  <a:srgbClr val="0F2942"/>
                 </a:solidFill>
                 <a:latin typeface="맑은 고딕"/>
               </a:rPr>
@@ -20626,7 +20626,7 @@
             <a:r>
               <a:rPr sz="900" b="0">
                 <a:solidFill>
-                  <a:srgbClr val="1E293B"/>
+                  <a:srgbClr val="0F2942"/>
                 </a:solidFill>
                 <a:latin typeface="맑은 고딕"/>
               </a:rPr>
@@ -20850,7 +20850,7 @@
             <a:r>
               <a:rPr sz="900" b="0">
                 <a:solidFill>
-                  <a:srgbClr val="1E293B"/>
+                  <a:srgbClr val="0F2942"/>
                 </a:solidFill>
                 <a:latin typeface="맑은 고딕"/>
               </a:rPr>
@@ -20869,7 +20869,7 @@
             <a:r>
               <a:rPr sz="900" b="0">
                 <a:solidFill>
-                  <a:srgbClr val="1E293B"/>
+                  <a:srgbClr val="0F2942"/>
                 </a:solidFill>
                 <a:latin typeface="맑은 고딕"/>
               </a:rPr>
@@ -21187,7 +21187,7 @@
                 </a:solidFill>
                 <a:latin typeface="맑은 고딕"/>
               </a:rPr>
-              <a:t>한빛글로벌 SyncGuard AI 시스템 구축  |  보고체계 관리 계획서</a:t>
+              <a:t>한빛글로벌 SyncFlow AI 시스템 구축  |  보고체계 관리 계획서</a:t>
             </a:r>
           </a:p>
         </p:txBody>
@@ -21491,7 +21491,7 @@
             <a:r>
               <a:rPr sz="919" b="0">
                 <a:solidFill>
-                  <a:srgbClr val="1E293B"/>
+                  <a:srgbClr val="0F2942"/>
                 </a:solidFill>
                 <a:latin typeface="맑은 고딕"/>
               </a:rPr>
@@ -21510,7 +21510,7 @@
             <a:r>
               <a:rPr sz="919" b="0">
                 <a:solidFill>
-                  <a:srgbClr val="1E293B"/>
+                  <a:srgbClr val="0F2942"/>
                 </a:solidFill>
                 <a:latin typeface="맑은 고딕"/>
               </a:rPr>
@@ -21529,11 +21529,11 @@
             <a:r>
               <a:rPr sz="919" b="0">
                 <a:solidFill>
-                  <a:srgbClr val="1E293B"/>
+                  <a:srgbClr val="0F2942"/>
                 </a:solidFill>
                 <a:latin typeface="맑은 고딕"/>
               </a:rPr>
-              <a:t>• 화면 UI 세부 문구 조정, 단일 API 필드 매핑 협의, 일반 버그(Minor) 수정 등</a:t>
+              <a:t>• 화면 UI 세부 조항 조정, 단일 API 필드 매핑 협의, 일반 버그(Minor) 수정 등</a:t>
             </a:r>
           </a:p>
           <a:p>
@@ -21548,7 +21548,7 @@
             <a:r>
               <a:rPr sz="919" b="0">
                 <a:solidFill>
-                  <a:srgbClr val="1E293B"/>
+                  <a:srgbClr val="0F2942"/>
                 </a:solidFill>
                 <a:latin typeface="맑은 고딕"/>
               </a:rPr>
@@ -21567,7 +21567,7 @@
             <a:r>
               <a:rPr sz="919" b="0">
                 <a:solidFill>
-                  <a:srgbClr val="1E293B"/>
+                  <a:srgbClr val="0F2942"/>
                 </a:solidFill>
                 <a:latin typeface="맑은 고딕"/>
               </a:rPr>
@@ -21586,11 +21586,11 @@
             <a:r>
               <a:rPr sz="919" b="0">
                 <a:solidFill>
-                  <a:srgbClr val="1E293B"/>
+                  <a:srgbClr val="0F2942"/>
                 </a:solidFill>
                 <a:latin typeface="맑은 고딕"/>
               </a:rPr>
-              <a:t>• 주관사 파트 리드(최현우 개발리드 등) ↔ 발주사 실무 담당자(RA Lab / IT 담당) 직접 협의</a:t>
+              <a:t>• 주관사 파트 리드(최현우 개발리드 등) ↔ 발주사 실무 담당자(품질법무검증팀 / IT 담당) 직접 협의</a:t>
             </a:r>
           </a:p>
           <a:p>
@@ -21605,7 +21605,7 @@
             <a:r>
               <a:rPr sz="919" b="0">
                 <a:solidFill>
-                  <a:srgbClr val="1E293B"/>
+                  <a:srgbClr val="0F2942"/>
                 </a:solidFill>
                 <a:latin typeface="맑은 고딕"/>
               </a:rPr>
@@ -21624,7 +21624,7 @@
             <a:r>
               <a:rPr sz="919" b="0">
                 <a:solidFill>
-                  <a:srgbClr val="1E293B"/>
+                  <a:srgbClr val="0F2942"/>
                 </a:solidFill>
                 <a:latin typeface="맑은 고딕"/>
               </a:rPr>
@@ -21848,7 +21848,7 @@
             <a:r>
               <a:rPr sz="919" b="0">
                 <a:solidFill>
-                  <a:srgbClr val="1E293B"/>
+                  <a:srgbClr val="0F2942"/>
                 </a:solidFill>
                 <a:latin typeface="맑은 고딕"/>
               </a:rPr>
@@ -21867,7 +21867,7 @@
             <a:r>
               <a:rPr sz="919" b="0">
                 <a:solidFill>
-                  <a:srgbClr val="1E293B"/>
+                  <a:srgbClr val="0F2942"/>
                 </a:solidFill>
                 <a:latin typeface="맑은 고딕"/>
               </a:rPr>
@@ -21886,11 +21886,11 @@
             <a:r>
               <a:rPr sz="919" b="0">
                 <a:solidFill>
-                  <a:srgbClr val="1E293B"/>
+                  <a:srgbClr val="0F2942"/>
                 </a:solidFill>
                 <a:latin typeface="맑은 고딕"/>
               </a:rPr>
-              <a:t>• 사내 방화벽 오픈 지연, SSO/MarketingHub/ProductLab 인터페이스 사양 미확정, AI 응답속도 저하 등</a:t>
+              <a:t>• 사내 방화벽 오픈 지연, SSO/SRM-Portal/PLM-Nexus 인터페이스 사양 미확정, AI 응답속도 저하 등</a:t>
             </a:r>
           </a:p>
           <a:p>
@@ -21905,7 +21905,7 @@
             <a:r>
               <a:rPr sz="919" b="0">
                 <a:solidFill>
-                  <a:srgbClr val="1E293B"/>
+                  <a:srgbClr val="0F2942"/>
                 </a:solidFill>
                 <a:latin typeface="맑은 고딕"/>
               </a:rPr>
@@ -21924,7 +21924,7 @@
             <a:r>
               <a:rPr sz="919" b="0">
                 <a:solidFill>
-                  <a:srgbClr val="1E293B"/>
+                  <a:srgbClr val="0F2942"/>
                 </a:solidFill>
                 <a:latin typeface="맑은 고딕"/>
               </a:rPr>
@@ -21943,7 +21943,7 @@
             <a:r>
               <a:rPr sz="919" b="0">
                 <a:solidFill>
-                  <a:srgbClr val="1E293B"/>
+                  <a:srgbClr val="0F2942"/>
                 </a:solidFill>
                 <a:latin typeface="맑은 고딕"/>
               </a:rPr>
@@ -21962,7 +21962,7 @@
             <a:r>
               <a:rPr sz="919" b="0">
                 <a:solidFill>
-                  <a:srgbClr val="1E293B"/>
+                  <a:srgbClr val="0F2942"/>
                 </a:solidFill>
                 <a:latin typeface="맑은 고딕"/>
               </a:rPr>
@@ -21981,7 +21981,7 @@
             <a:r>
               <a:rPr sz="919" b="0">
                 <a:solidFill>
-                  <a:srgbClr val="1E293B"/>
+                  <a:srgbClr val="0F2942"/>
                 </a:solidFill>
                 <a:latin typeface="맑은 고딕"/>
               </a:rPr>
@@ -22205,7 +22205,7 @@
             <a:r>
               <a:rPr sz="919" b="0">
                 <a:solidFill>
-                  <a:srgbClr val="1E293B"/>
+                  <a:srgbClr val="0F2942"/>
                 </a:solidFill>
                 <a:latin typeface="맑은 고딕"/>
               </a:rPr>
@@ -22224,7 +22224,7 @@
             <a:r>
               <a:rPr sz="919" b="0">
                 <a:solidFill>
-                  <a:srgbClr val="1E293B"/>
+                  <a:srgbClr val="0F2942"/>
                 </a:solidFill>
                 <a:latin typeface="맑은 고딕"/>
               </a:rPr>
@@ -22243,7 +22243,7 @@
             <a:r>
               <a:rPr sz="919" b="0">
                 <a:solidFill>
-                  <a:srgbClr val="1E293B"/>
+                  <a:srgbClr val="0F2942"/>
                 </a:solidFill>
                 <a:latin typeface="맑은 고딕"/>
               </a:rPr>
@@ -22262,7 +22262,7 @@
             <a:r>
               <a:rPr sz="919" b="0">
                 <a:solidFill>
-                  <a:srgbClr val="1E293B"/>
+                  <a:srgbClr val="0F2942"/>
                 </a:solidFill>
                 <a:latin typeface="맑은 고딕"/>
               </a:rPr>
@@ -22281,7 +22281,7 @@
             <a:r>
               <a:rPr sz="919" b="0">
                 <a:solidFill>
-                  <a:srgbClr val="1E293B"/>
+                  <a:srgbClr val="0F2942"/>
                 </a:solidFill>
                 <a:latin typeface="맑은 고딕"/>
               </a:rPr>
@@ -22300,11 +22300,11 @@
             <a:r>
               <a:rPr sz="919" b="0">
                 <a:solidFill>
-                  <a:srgbClr val="1E293B"/>
+                  <a:srgbClr val="0F2942"/>
                 </a:solidFill>
                 <a:latin typeface="맑은 고딕"/>
               </a:rPr>
-              <a:t>• 수행사 사업총괄(박준혁) 및 대표단 ↔ 발주사 연구전략Lab/ERP플랫폼 부서장 공식 보고</a:t>
+              <a:t>• 수행사 사업총괄(박준혁) 및 대표단 ↔ 발주사 공급망혁신팀/ERP플랫폼 부서장 공식 보고</a:t>
             </a:r>
           </a:p>
           <a:p>
@@ -22319,7 +22319,7 @@
             <a:r>
               <a:rPr sz="919" b="0">
                 <a:solidFill>
-                  <a:srgbClr val="1E293B"/>
+                  <a:srgbClr val="0F2942"/>
                 </a:solidFill>
                 <a:latin typeface="맑은 고딕"/>
               </a:rPr>
@@ -22767,7 +22767,7 @@
                 </a:solidFill>
                 <a:latin typeface="맑은 고딕"/>
               </a:rPr>
-              <a:t>한빛글로벌 SyncGuard AI 시스템 구축  |  보고체계 관리 계획서</a:t>
+              <a:t>한빛글로벌 SyncFlow AI 시스템 구축  |  보고체계 관리 계획서</a:t>
             </a:r>
           </a:p>
         </p:txBody>
@@ -23150,7 +23150,7 @@
                       <a:r>
                         <a:rPr sz="919" b="1">
                           <a:solidFill>
-                            <a:srgbClr val="1E293B"/>
+                            <a:srgbClr val="0F2942"/>
                           </a:solidFill>
                           <a:latin typeface="맑은 고딕"/>
                         </a:rPr>
@@ -23169,11 +23169,11 @@
                       <a:r>
                         <a:rPr sz="919" b="1">
                           <a:solidFill>
-                            <a:srgbClr val="1E293B"/>
+                            <a:srgbClr val="0F2942"/>
                           </a:solidFill>
                           <a:latin typeface="맑은 고딕"/>
                         </a:rPr>
-                        <a:t>(syncguard_ai 표준 폴더)</a:t>
+                        <a:t>(syncflow_ai 표준 폴더)</a:t>
                       </a:r>
                     </a:p>
                   </a:txBody>
@@ -23219,7 +23219,7 @@
                       <a:r>
                         <a:rPr sz="919" b="0">
                           <a:solidFill>
-                            <a:srgbClr val="1E293B"/>
+                            <a:srgbClr val="0F2942"/>
                           </a:solidFill>
                           <a:latin typeface="맑은 고딕"/>
                         </a:rPr>
@@ -23238,7 +23238,7 @@
                       <a:r>
                         <a:rPr sz="919" b="0">
                           <a:solidFill>
-                            <a:srgbClr val="1E293B"/>
+                            <a:srgbClr val="0F2942"/>
                           </a:solidFill>
                           <a:latin typeface="맑은 고딕"/>
                         </a:rPr>
@@ -23288,7 +23288,7 @@
                       <a:r>
                         <a:rPr sz="919" b="0">
                           <a:solidFill>
-                            <a:srgbClr val="1E293B"/>
+                            <a:srgbClr val="0F2942"/>
                           </a:solidFill>
                           <a:latin typeface="맑은 고딕"/>
                         </a:rPr>
@@ -23307,7 +23307,7 @@
                       <a:r>
                         <a:rPr sz="919" b="0">
                           <a:solidFill>
-                            <a:srgbClr val="1E293B"/>
+                            <a:srgbClr val="0F2942"/>
                           </a:solidFill>
                           <a:latin typeface="맑은 고딕"/>
                         </a:rPr>
@@ -23357,7 +23357,7 @@
                       <a:r>
                         <a:rPr sz="919" b="0">
                           <a:solidFill>
-                            <a:srgbClr val="1E293B"/>
+                            <a:srgbClr val="0F2942"/>
                           </a:solidFill>
                           <a:latin typeface="맑은 고딕"/>
                         </a:rPr>
@@ -23376,7 +23376,7 @@
                       <a:r>
                         <a:rPr sz="919" b="0">
                           <a:solidFill>
-                            <a:srgbClr val="1E293B"/>
+                            <a:srgbClr val="0F2942"/>
                           </a:solidFill>
                           <a:latin typeface="맑은 고딕"/>
                         </a:rPr>
@@ -23426,7 +23426,7 @@
                       <a:r>
                         <a:rPr sz="919" b="0">
                           <a:solidFill>
-                            <a:srgbClr val="1E293B"/>
+                            <a:srgbClr val="0F2942"/>
                           </a:solidFill>
                           <a:latin typeface="맑은 고딕"/>
                         </a:rPr>
@@ -23445,7 +23445,7 @@
                       <a:r>
                         <a:rPr sz="919" b="0">
                           <a:solidFill>
-                            <a:srgbClr val="1E293B"/>
+                            <a:srgbClr val="0F2942"/>
                           </a:solidFill>
                           <a:latin typeface="맑은 고딕"/>
                         </a:rPr>
@@ -23497,7 +23497,7 @@
                       <a:r>
                         <a:rPr sz="919" b="1">
                           <a:solidFill>
-                            <a:srgbClr val="1E293B"/>
+                            <a:srgbClr val="0F2942"/>
                           </a:solidFill>
                           <a:latin typeface="맑은 고딕"/>
                         </a:rPr>
@@ -23516,7 +23516,7 @@
                       <a:r>
                         <a:rPr sz="919" b="1">
                           <a:solidFill>
-                            <a:srgbClr val="1E293B"/>
+                            <a:srgbClr val="0F2942"/>
                           </a:solidFill>
                           <a:latin typeface="맑은 고딕"/>
                         </a:rPr>
@@ -23566,7 +23566,7 @@
                       <a:r>
                         <a:rPr sz="919" b="0">
                           <a:solidFill>
-                            <a:srgbClr val="1E293B"/>
+                            <a:srgbClr val="0F2942"/>
                           </a:solidFill>
                           <a:latin typeface="맑은 고딕"/>
                         </a:rPr>
@@ -23585,7 +23585,7 @@
                       <a:r>
                         <a:rPr sz="919" b="0">
                           <a:solidFill>
-                            <a:srgbClr val="1E293B"/>
+                            <a:srgbClr val="0F2942"/>
                           </a:solidFill>
                           <a:latin typeface="맑은 고딕"/>
                         </a:rPr>
@@ -23635,7 +23635,7 @@
                       <a:r>
                         <a:rPr sz="919" b="0">
                           <a:solidFill>
-                            <a:srgbClr val="1E293B"/>
+                            <a:srgbClr val="0F2942"/>
                           </a:solidFill>
                           <a:latin typeface="맑은 고딕"/>
                         </a:rPr>
@@ -23654,7 +23654,7 @@
                       <a:r>
                         <a:rPr sz="919" b="0">
                           <a:solidFill>
-                            <a:srgbClr val="1E293B"/>
+                            <a:srgbClr val="0F2942"/>
                           </a:solidFill>
                           <a:latin typeface="맑은 고딕"/>
                         </a:rPr>
@@ -23704,11 +23704,11 @@
                       <a:r>
                         <a:rPr sz="919" b="0">
                           <a:solidFill>
-                            <a:srgbClr val="1E293B"/>
+                            <a:srgbClr val="0F2942"/>
                           </a:solidFill>
                           <a:latin typeface="맑은 고딕"/>
                         </a:rPr>
-                        <a:t>• 제목 말머리에 [SyncGuard AI] 필수 표기</a:t>
+                        <a:t>• 제목 말머리에 [SyncFlow AI] 필수 표기</a:t>
                       </a:r>
                     </a:p>
                     <a:p>
@@ -23723,7 +23723,7 @@
                       <a:r>
                         <a:rPr sz="919" b="0">
                           <a:solidFill>
-                            <a:srgbClr val="1E293B"/>
+                            <a:srgbClr val="0F2942"/>
                           </a:solidFill>
                           <a:latin typeface="맑은 고딕"/>
                         </a:rPr>
@@ -23773,7 +23773,7 @@
                       <a:r>
                         <a:rPr sz="919" b="0">
                           <a:solidFill>
-                            <a:srgbClr val="1E293B"/>
+                            <a:srgbClr val="0F2942"/>
                           </a:solidFill>
                           <a:latin typeface="맑은 고딕"/>
                         </a:rPr>
@@ -23792,7 +23792,7 @@
                       <a:r>
                         <a:rPr sz="919" b="0">
                           <a:solidFill>
-                            <a:srgbClr val="1E293B"/>
+                            <a:srgbClr val="0F2942"/>
                           </a:solidFill>
                           <a:latin typeface="맑은 고딕"/>
                         </a:rPr>
@@ -23844,7 +23844,7 @@
                       <a:r>
                         <a:rPr sz="919" b="1">
                           <a:solidFill>
-                            <a:srgbClr val="1E293B"/>
+                            <a:srgbClr val="0F2942"/>
                           </a:solidFill>
                           <a:latin typeface="맑은 고딕"/>
                         </a:rPr>
@@ -23863,7 +23863,7 @@
                       <a:r>
                         <a:rPr sz="919" b="1">
                           <a:solidFill>
-                            <a:srgbClr val="1E293B"/>
+                            <a:srgbClr val="0F2942"/>
                           </a:solidFill>
                           <a:latin typeface="맑은 고딕"/>
                         </a:rPr>
@@ -23913,7 +23913,7 @@
                       <a:r>
                         <a:rPr sz="919" b="0">
                           <a:solidFill>
-                            <a:srgbClr val="1E293B"/>
+                            <a:srgbClr val="0F2942"/>
                           </a:solidFill>
                           <a:latin typeface="맑은 고딕"/>
                         </a:rPr>
@@ -23932,7 +23932,7 @@
                       <a:r>
                         <a:rPr sz="919" b="0">
                           <a:solidFill>
-                            <a:srgbClr val="1E293B"/>
+                            <a:srgbClr val="0F2942"/>
                           </a:solidFill>
                           <a:latin typeface="맑은 고딕"/>
                         </a:rPr>
@@ -23982,7 +23982,7 @@
                       <a:r>
                         <a:rPr sz="919" b="0">
                           <a:solidFill>
-                            <a:srgbClr val="1E293B"/>
+                            <a:srgbClr val="0F2942"/>
                           </a:solidFill>
                           <a:latin typeface="맑은 고딕"/>
                         </a:rPr>
@@ -24001,7 +24001,7 @@
                       <a:r>
                         <a:rPr sz="919" b="0">
                           <a:solidFill>
-                            <a:srgbClr val="1E293B"/>
+                            <a:srgbClr val="0F2942"/>
                           </a:solidFill>
                           <a:latin typeface="맑은 고딕"/>
                         </a:rPr>
@@ -24051,7 +24051,7 @@
                       <a:r>
                         <a:rPr sz="919" b="0">
                           <a:solidFill>
-                            <a:srgbClr val="1E293B"/>
+                            <a:srgbClr val="0F2942"/>
                           </a:solidFill>
                           <a:latin typeface="맑은 고딕"/>
                         </a:rPr>
@@ -24070,7 +24070,7 @@
                       <a:r>
                         <a:rPr sz="919" b="0">
                           <a:solidFill>
-                            <a:srgbClr val="1E293B"/>
+                            <a:srgbClr val="0F2942"/>
                           </a:solidFill>
                           <a:latin typeface="맑은 고딕"/>
                         </a:rPr>
@@ -24120,7 +24120,7 @@
                       <a:r>
                         <a:rPr sz="919" b="0">
                           <a:solidFill>
-                            <a:srgbClr val="1E293B"/>
+                            <a:srgbClr val="0F2942"/>
                           </a:solidFill>
                           <a:latin typeface="맑은 고딕"/>
                         </a:rPr>
@@ -24172,7 +24172,7 @@
                       <a:r>
                         <a:rPr sz="919" b="1">
                           <a:solidFill>
-                            <a:srgbClr val="1E293B"/>
+                            <a:srgbClr val="0F2942"/>
                           </a:solidFill>
                           <a:latin typeface="맑은 고딕"/>
                         </a:rPr>
@@ -24191,7 +24191,7 @@
                       <a:r>
                         <a:rPr sz="919" b="1">
                           <a:solidFill>
-                            <a:srgbClr val="1E293B"/>
+                            <a:srgbClr val="0F2942"/>
                           </a:solidFill>
                           <a:latin typeface="맑은 고딕"/>
                         </a:rPr>
@@ -24241,7 +24241,7 @@
                       <a:r>
                         <a:rPr sz="919" b="0">
                           <a:solidFill>
-                            <a:srgbClr val="1E293B"/>
+                            <a:srgbClr val="0F2942"/>
                           </a:solidFill>
                           <a:latin typeface="맑은 고딕"/>
                         </a:rPr>
@@ -24260,7 +24260,7 @@
                       <a:r>
                         <a:rPr sz="919" b="0">
                           <a:solidFill>
-                            <a:srgbClr val="1E293B"/>
+                            <a:srgbClr val="0F2942"/>
                           </a:solidFill>
                           <a:latin typeface="맑은 고딕"/>
                         </a:rPr>
@@ -24310,7 +24310,7 @@
                       <a:r>
                         <a:rPr sz="919" b="0">
                           <a:solidFill>
-                            <a:srgbClr val="1E293B"/>
+                            <a:srgbClr val="0F2942"/>
                           </a:solidFill>
                           <a:latin typeface="맑은 고딕"/>
                         </a:rPr>
@@ -24360,7 +24360,7 @@
                       <a:r>
                         <a:rPr sz="919" b="0">
                           <a:solidFill>
-                            <a:srgbClr val="1E293B"/>
+                            <a:srgbClr val="0F2942"/>
                           </a:solidFill>
                           <a:latin typeface="맑은 고딕"/>
                         </a:rPr>
@@ -24379,7 +24379,7 @@
                       <a:r>
                         <a:rPr sz="919" b="0">
                           <a:solidFill>
-                            <a:srgbClr val="1E293B"/>
+                            <a:srgbClr val="0F2942"/>
                           </a:solidFill>
                           <a:latin typeface="맑은 고딕"/>
                         </a:rPr>
@@ -24429,7 +24429,7 @@
                       <a:r>
                         <a:rPr sz="919" b="0">
                           <a:solidFill>
-                            <a:srgbClr val="1E293B"/>
+                            <a:srgbClr val="0F2942"/>
                           </a:solidFill>
                           <a:latin typeface="맑은 고딕"/>
                         </a:rPr>
@@ -24481,7 +24481,7 @@
                       <a:r>
                         <a:rPr sz="919" b="1">
                           <a:solidFill>
-                            <a:srgbClr val="1E293B"/>
+                            <a:srgbClr val="0F2942"/>
                           </a:solidFill>
                           <a:latin typeface="맑은 고딕"/>
                         </a:rPr>
@@ -24500,7 +24500,7 @@
                       <a:r>
                         <a:rPr sz="919" b="1">
                           <a:solidFill>
-                            <a:srgbClr val="1E293B"/>
+                            <a:srgbClr val="0F2942"/>
                           </a:solidFill>
                           <a:latin typeface="맑은 고딕"/>
                         </a:rPr>
@@ -24550,7 +24550,7 @@
                       <a:r>
                         <a:rPr sz="919" b="0">
                           <a:solidFill>
-                            <a:srgbClr val="1E293B"/>
+                            <a:srgbClr val="0F2942"/>
                           </a:solidFill>
                           <a:latin typeface="맑은 고딕"/>
                         </a:rPr>
@@ -24569,11 +24569,11 @@
                       <a:r>
                         <a:rPr sz="919" b="0">
                           <a:solidFill>
-                            <a:srgbClr val="1E293B"/>
+                            <a:srgbClr val="0F2942"/>
                           </a:solidFill>
                           <a:latin typeface="맑은 고딕"/>
                         </a:rPr>
-                        <a:t>• 내부 ALB 및 타 시스템(MarketingHub/ProductLab) 방화벽 개통</a:t>
+                        <a:t>• 내부 ALB 및 타 시스템(SRM-Portal/PLM-Nexus) 방화벽 개통</a:t>
                       </a:r>
                     </a:p>
                   </a:txBody>
@@ -24619,7 +24619,7 @@
                       <a:r>
                         <a:rPr sz="919" b="0">
                           <a:solidFill>
-                            <a:srgbClr val="1E293B"/>
+                            <a:srgbClr val="0F2942"/>
                           </a:solidFill>
                           <a:latin typeface="맑은 고딕"/>
                         </a:rPr>
@@ -24638,7 +24638,7 @@
                       <a:r>
                         <a:rPr sz="919" b="0">
                           <a:solidFill>
-                            <a:srgbClr val="1E293B"/>
+                            <a:srgbClr val="0F2942"/>
                           </a:solidFill>
                           <a:latin typeface="맑은 고딕"/>
                         </a:rPr>
@@ -24688,7 +24688,7 @@
                       <a:r>
                         <a:rPr sz="919" b="0">
                           <a:solidFill>
-                            <a:srgbClr val="1E293B"/>
+                            <a:srgbClr val="0F2942"/>
                           </a:solidFill>
                           <a:latin typeface="맑은 고딕"/>
                         </a:rPr>
@@ -24707,7 +24707,7 @@
                       <a:r>
                         <a:rPr sz="919" b="0">
                           <a:solidFill>
-                            <a:srgbClr val="1E293B"/>
+                            <a:srgbClr val="0F2942"/>
                           </a:solidFill>
                           <a:latin typeface="맑은 고딕"/>
                         </a:rPr>
@@ -24757,7 +24757,7 @@
                       <a:r>
                         <a:rPr sz="919" b="0">
                           <a:solidFill>
-                            <a:srgbClr val="1E293B"/>
+                            <a:srgbClr val="0F2942"/>
                           </a:solidFill>
                           <a:latin typeface="맑은 고딕"/>
                         </a:rPr>
@@ -24776,7 +24776,7 @@
                       <a:r>
                         <a:rPr sz="919" b="0">
                           <a:solidFill>
-                            <a:srgbClr val="1E293B"/>
+                            <a:srgbClr val="0F2942"/>
                           </a:solidFill>
                           <a:latin typeface="맑은 고딕"/>
                         </a:rPr>
@@ -25126,7 +25126,7 @@
                 </a:solidFill>
                 <a:latin typeface="맑은 고딕"/>
               </a:rPr>
-              <a:t>프로젝트 연락처 대장(SyncGuard AI_프로젝트_연락처.xlsx)에 등재된 발주사·주관사·협력사 핵심 인력 현황입니다.</a:t>
+              <a:t>프로젝트 연락처 대장(SyncFlow AI_프로젝트_연락처.xlsx)에 등재된 발주사·주관사·협력사 핵심 인력 현황입니다.</a:t>
             </a:r>
           </a:p>
         </p:txBody>
@@ -25254,7 +25254,7 @@
                 </a:solidFill>
                 <a:latin typeface="맑은 고딕"/>
               </a:rPr>
-              <a:t>한빛글로벌 SyncGuard AI 시스템 구축  |  보고체계 관리 계획서</a:t>
+              <a:t>한빛글로벌 SyncFlow AI 시스템 구축  |  보고체계 관리 계획서</a:t>
             </a:r>
           </a:p>
         </p:txBody>
@@ -25739,7 +25739,7 @@
                       <a:r>
                         <a:rPr sz="880" b="1">
                           <a:solidFill>
-                            <a:srgbClr val="1E293B"/>
+                            <a:srgbClr val="0F2942"/>
                           </a:solidFill>
                           <a:latin typeface="맑은 고딕"/>
                         </a:rPr>
@@ -25789,11 +25789,11 @@
                       <a:r>
                         <a:rPr sz="880" b="0">
                           <a:solidFill>
-                            <a:srgbClr val="1E293B"/>
+                            <a:srgbClr val="0F2942"/>
                           </a:solidFill>
                           <a:latin typeface="맑은 고딕"/>
                         </a:rPr>
-                        <a:t>한빛글로벌 / 연구전략Lab</a:t>
+                        <a:t>한빛글로벌 / 공급망혁신팀</a:t>
                       </a:r>
                     </a:p>
                   </a:txBody>
@@ -25839,7 +25839,7 @@
                       <a:r>
                         <a:rPr sz="880" b="1">
                           <a:solidFill>
-                            <a:srgbClr val="1E293B"/>
+                            <a:srgbClr val="0F2942"/>
                           </a:solidFill>
                           <a:latin typeface="맑은 고딕"/>
                         </a:rPr>
@@ -25889,7 +25889,7 @@
                       <a:r>
                         <a:rPr sz="880" b="0">
                           <a:solidFill>
-                            <a:srgbClr val="1E293B"/>
+                            <a:srgbClr val="0F2942"/>
                           </a:solidFill>
                           <a:latin typeface="맑은 고딕"/>
                         </a:rPr>
@@ -25939,7 +25939,7 @@
                       <a:r>
                         <a:rPr sz="880" b="0">
                           <a:solidFill>
-                            <a:srgbClr val="1E293B"/>
+                            <a:srgbClr val="0F2942"/>
                           </a:solidFill>
                           <a:latin typeface="맑은 고딕"/>
                         </a:rPr>
@@ -25989,7 +25989,7 @@
                       <a:r>
                         <a:rPr sz="880" b="0">
                           <a:solidFill>
-                            <a:srgbClr val="1E293B"/>
+                            <a:srgbClr val="0F2942"/>
                           </a:solidFill>
                           <a:latin typeface="맑은 고딕"/>
                         </a:rPr>
@@ -26039,7 +26039,7 @@
                       <a:r>
                         <a:rPr sz="880" b="0">
                           <a:solidFill>
-                            <a:srgbClr val="1E293B"/>
+                            <a:srgbClr val="0F2942"/>
                           </a:solidFill>
                           <a:latin typeface="맑은 고딕"/>
                         </a:rPr>
@@ -26091,7 +26091,7 @@
                       <a:r>
                         <a:rPr sz="880" b="1">
                           <a:solidFill>
-                            <a:srgbClr val="1E293B"/>
+                            <a:srgbClr val="0F2942"/>
                           </a:solidFill>
                           <a:latin typeface="맑은 고딕"/>
                         </a:rPr>
@@ -26141,7 +26141,7 @@
                       <a:r>
                         <a:rPr sz="880" b="0">
                           <a:solidFill>
-                            <a:srgbClr val="1E293B"/>
+                            <a:srgbClr val="0F2942"/>
                           </a:solidFill>
                           <a:latin typeface="맑은 고딕"/>
                         </a:rPr>
@@ -26191,7 +26191,7 @@
                       <a:r>
                         <a:rPr sz="880" b="1">
                           <a:solidFill>
-                            <a:srgbClr val="1E293B"/>
+                            <a:srgbClr val="0F2942"/>
                           </a:solidFill>
                           <a:latin typeface="맑은 고딕"/>
                         </a:rPr>
@@ -26241,7 +26241,7 @@
                       <a:r>
                         <a:rPr sz="880" b="0">
                           <a:solidFill>
-                            <a:srgbClr val="1E293B"/>
+                            <a:srgbClr val="0F2942"/>
                           </a:solidFill>
                           <a:latin typeface="맑은 고딕"/>
                         </a:rPr>
@@ -26291,7 +26291,7 @@
                       <a:r>
                         <a:rPr sz="880" b="0">
                           <a:solidFill>
-                            <a:srgbClr val="1E293B"/>
+                            <a:srgbClr val="0F2942"/>
                           </a:solidFill>
                           <a:latin typeface="맑은 고딕"/>
                         </a:rPr>
@@ -26341,7 +26341,7 @@
                       <a:r>
                         <a:rPr sz="880" b="0">
                           <a:solidFill>
-                            <a:srgbClr val="1E293B"/>
+                            <a:srgbClr val="0F2942"/>
                           </a:solidFill>
                           <a:latin typeface="맑은 고딕"/>
                         </a:rPr>
@@ -26391,11 +26391,11 @@
                       <a:r>
                         <a:rPr sz="880" b="0">
                           <a:solidFill>
-                            <a:srgbClr val="1E293B"/>
+                            <a:srgbClr val="0F2942"/>
                           </a:solidFill>
                           <a:latin typeface="맑은 고딕"/>
                         </a:rPr>
-                        <a:t>AWS 클라우드 인프라, 보안/방화벽, 사내 시스템(SSO/MarketingHub) 연계 총괄</a:t>
+                        <a:t>AWS 클라우드 인프라, 보안/방화벽, 사내 시스템(SSO/SRM-Portal) 연계 총괄</a:t>
                       </a:r>
                     </a:p>
                   </a:txBody>
@@ -26443,7 +26443,7 @@
                       <a:r>
                         <a:rPr sz="880" b="1">
                           <a:solidFill>
-                            <a:srgbClr val="1E293B"/>
+                            <a:srgbClr val="0F2942"/>
                           </a:solidFill>
                           <a:latin typeface="맑은 고딕"/>
                         </a:rPr>
@@ -26493,11 +26493,11 @@
                       <a:r>
                         <a:rPr sz="880" b="0">
                           <a:solidFill>
-                            <a:srgbClr val="1E293B"/>
+                            <a:srgbClr val="0F2942"/>
                           </a:solidFill>
                           <a:latin typeface="맑은 고딕"/>
                         </a:rPr>
-                        <a:t>한빛글로벌 / RA Lab</a:t>
+                        <a:t>한빛글로벌 / 품질법무검증팀</a:t>
                       </a:r>
                     </a:p>
                   </a:txBody>
@@ -26543,7 +26543,7 @@
                       <a:r>
                         <a:rPr sz="880" b="1">
                           <a:solidFill>
-                            <a:srgbClr val="1E293B"/>
+                            <a:srgbClr val="0F2942"/>
                           </a:solidFill>
                           <a:latin typeface="맑은 고딕"/>
                         </a:rPr>
@@ -26593,11 +26593,11 @@
                       <a:r>
                         <a:rPr sz="880" b="0">
                           <a:solidFill>
-                            <a:srgbClr val="1E293B"/>
+                            <a:srgbClr val="0F2942"/>
                           </a:solidFill>
                           <a:latin typeface="맑은 고딕"/>
                         </a:rPr>
-                        <a:t>현업 실무 (RA)</a:t>
+                        <a:t>현업 실무 (QA)</a:t>
                       </a:r>
                     </a:p>
                   </a:txBody>
@@ -26643,7 +26643,7 @@
                       <a:r>
                         <a:rPr sz="880" b="0">
                           <a:solidFill>
-                            <a:srgbClr val="1E293B"/>
+                            <a:srgbClr val="0F2942"/>
                           </a:solidFill>
                           <a:latin typeface="맑은 고딕"/>
                         </a:rPr>
@@ -26693,7 +26693,7 @@
                       <a:r>
                         <a:rPr sz="880" b="0">
                           <a:solidFill>
-                            <a:srgbClr val="1E293B"/>
+                            <a:srgbClr val="0F2942"/>
                           </a:solidFill>
                           <a:latin typeface="맑은 고딕"/>
                         </a:rPr>
@@ -26743,11 +26743,11 @@
                       <a:r>
                         <a:rPr sz="880" b="0">
                           <a:solidFill>
-                            <a:srgbClr val="1E293B"/>
+                            <a:srgbClr val="0F2942"/>
                           </a:solidFill>
                           <a:latin typeface="맑은 고딕"/>
                         </a:rPr>
-                        <a:t>제품 표시·광고 클레임 검토 기준 정의, 규칙사전 및 골든셋 검증</a:t>
+                        <a:t>구매계약·기술규격 규격·계약 검토 기준 정의, 규칙사전 및 골든셋 검증</a:t>
                       </a:r>
                     </a:p>
                   </a:txBody>
@@ -26795,7 +26795,7 @@
                       <a:r>
                         <a:rPr sz="880" b="1">
                           <a:solidFill>
-                            <a:srgbClr val="1E293B"/>
+                            <a:srgbClr val="0F2942"/>
                           </a:solidFill>
                           <a:latin typeface="맑은 고딕"/>
                         </a:rPr>
@@ -26845,11 +26845,11 @@
                       <a:r>
                         <a:rPr sz="880" b="0">
                           <a:solidFill>
-                            <a:srgbClr val="1E293B"/>
+                            <a:srgbClr val="0F2942"/>
                           </a:solidFill>
                           <a:latin typeface="맑은 고딕"/>
                         </a:rPr>
-                        <a:t>한빛글로벌 / RA Lab</a:t>
+                        <a:t>한빛글로벌 / 품질법무검증팀</a:t>
                       </a:r>
                     </a:p>
                   </a:txBody>
@@ -26895,7 +26895,7 @@
                       <a:r>
                         <a:rPr sz="880" b="1">
                           <a:solidFill>
-                            <a:srgbClr val="1E293B"/>
+                            <a:srgbClr val="0F2942"/>
                           </a:solidFill>
                           <a:latin typeface="맑은 고딕"/>
                         </a:rPr>
@@ -26945,11 +26945,11 @@
                       <a:r>
                         <a:rPr sz="880" b="0">
                           <a:solidFill>
-                            <a:srgbClr val="1E293B"/>
+                            <a:srgbClr val="0F2942"/>
                           </a:solidFill>
                           <a:latin typeface="맑은 고딕"/>
                         </a:rPr>
-                        <a:t>현업 실무 (RA)</a:t>
+                        <a:t>현업 실무 (QA)</a:t>
                       </a:r>
                     </a:p>
                   </a:txBody>
@@ -26995,7 +26995,7 @@
                       <a:r>
                         <a:rPr sz="880" b="0">
                           <a:solidFill>
-                            <a:srgbClr val="1E293B"/>
+                            <a:srgbClr val="0F2942"/>
                           </a:solidFill>
                           <a:latin typeface="맑은 고딕"/>
                         </a:rPr>
@@ -27045,7 +27045,7 @@
                       <a:r>
                         <a:rPr sz="880" b="0">
                           <a:solidFill>
-                            <a:srgbClr val="1E293B"/>
+                            <a:srgbClr val="0F2942"/>
                           </a:solidFill>
                           <a:latin typeface="맑은 고딕"/>
                         </a:rPr>
@@ -27095,11 +27095,11 @@
                       <a:r>
                         <a:rPr sz="880" b="0">
                           <a:solidFill>
-                            <a:srgbClr val="1E293B"/>
+                            <a:srgbClr val="0F2942"/>
                           </a:solidFill>
                           <a:latin typeface="맑은 고딕"/>
                         </a:rPr>
-                        <a:t>카테고리별 금지/주의 표현 사례 제공, AI 대체 문구 수용성 평가</a:t>
+                        <a:t>카테고리별 금지/주의 표현 사례 제공, AI 대체 조항 수용성 평가</a:t>
                       </a:r>
                     </a:p>
                   </a:txBody>
@@ -27147,7 +27147,7 @@
                       <a:r>
                         <a:rPr sz="880" b="1">
                           <a:solidFill>
-                            <a:srgbClr val="1E293B"/>
+                            <a:srgbClr val="0F2942"/>
                           </a:solidFill>
                           <a:latin typeface="맑은 고딕"/>
                         </a:rPr>
@@ -27197,11 +27197,11 @@
                       <a:r>
                         <a:rPr sz="880" b="0">
                           <a:solidFill>
-                            <a:srgbClr val="1E293B"/>
+                            <a:srgbClr val="0F2942"/>
                           </a:solidFill>
                           <a:latin typeface="맑은 고딕"/>
                         </a:rPr>
-                        <a:t>한빛글로벌 / RA Lab</a:t>
+                        <a:t>한빛글로벌 / 품질법무검증팀</a:t>
                       </a:r>
                     </a:p>
                   </a:txBody>
@@ -27247,7 +27247,7 @@
                       <a:r>
                         <a:rPr sz="880" b="1">
                           <a:solidFill>
-                            <a:srgbClr val="1E293B"/>
+                            <a:srgbClr val="0F2942"/>
                           </a:solidFill>
                           <a:latin typeface="맑은 고딕"/>
                         </a:rPr>
@@ -27297,11 +27297,11 @@
                       <a:r>
                         <a:rPr sz="880" b="0">
                           <a:solidFill>
-                            <a:srgbClr val="1E293B"/>
+                            <a:srgbClr val="0F2942"/>
                           </a:solidFill>
                           <a:latin typeface="맑은 고딕"/>
                         </a:rPr>
-                        <a:t>현업 실무 (RA)</a:t>
+                        <a:t>현업 실무 (QA)</a:t>
                       </a:r>
                     </a:p>
                   </a:txBody>
@@ -27347,7 +27347,7 @@
                       <a:r>
                         <a:rPr sz="880" b="0">
                           <a:solidFill>
-                            <a:srgbClr val="1E293B"/>
+                            <a:srgbClr val="0F2942"/>
                           </a:solidFill>
                           <a:latin typeface="맑은 고딕"/>
                         </a:rPr>
@@ -27397,7 +27397,7 @@
                       <a:r>
                         <a:rPr sz="880" b="0">
                           <a:solidFill>
-                            <a:srgbClr val="1E293B"/>
+                            <a:srgbClr val="0F2942"/>
                           </a:solidFill>
                           <a:latin typeface="맑은 고딕"/>
                         </a:rPr>
@@ -27447,7 +27447,7 @@
                       <a:r>
                         <a:rPr sz="880" b="0">
                           <a:solidFill>
-                            <a:srgbClr val="1E293B"/>
+                            <a:srgbClr val="0F2942"/>
                           </a:solidFill>
                           <a:latin typeface="맑은 고딕"/>
                         </a:rPr>
@@ -27499,7 +27499,7 @@
                       <a:r>
                         <a:rPr sz="880" b="1">
                           <a:solidFill>
-                            <a:srgbClr val="1E293B"/>
+                            <a:srgbClr val="0F2942"/>
                           </a:solidFill>
                           <a:latin typeface="맑은 고딕"/>
                         </a:rPr>
@@ -27549,7 +27549,7 @@
                       <a:r>
                         <a:rPr sz="880" b="0">
                           <a:solidFill>
-                            <a:srgbClr val="1E293B"/>
+                            <a:srgbClr val="0F2942"/>
                           </a:solidFill>
                           <a:latin typeface="맑은 고딕"/>
                         </a:rPr>
@@ -27599,7 +27599,7 @@
                       <a:r>
                         <a:rPr sz="880" b="1">
                           <a:solidFill>
-                            <a:srgbClr val="1E293B"/>
+                            <a:srgbClr val="0F2942"/>
                           </a:solidFill>
                           <a:latin typeface="맑은 고딕"/>
                         </a:rPr>
@@ -27649,7 +27649,7 @@
                       <a:r>
                         <a:rPr sz="880" b="0">
                           <a:solidFill>
-                            <a:srgbClr val="1E293B"/>
+                            <a:srgbClr val="0F2942"/>
                           </a:solidFill>
                           <a:latin typeface="맑은 고딕"/>
                         </a:rPr>
@@ -27699,7 +27699,7 @@
                       <a:r>
                         <a:rPr sz="880" b="0">
                           <a:solidFill>
-                            <a:srgbClr val="1E293B"/>
+                            <a:srgbClr val="0F2942"/>
                           </a:solidFill>
                           <a:latin typeface="맑은 고딕"/>
                         </a:rPr>
@@ -27749,7 +27749,7 @@
                       <a:r>
                         <a:rPr sz="880" b="0">
                           <a:solidFill>
-                            <a:srgbClr val="1E293B"/>
+                            <a:srgbClr val="0F2942"/>
                           </a:solidFill>
                           <a:latin typeface="맑은 고딕"/>
                         </a:rPr>
@@ -27799,7 +27799,7 @@
                       <a:r>
                         <a:rPr sz="880" b="0">
                           <a:solidFill>
-                            <a:srgbClr val="1E293B"/>
+                            <a:srgbClr val="0F2942"/>
                           </a:solidFill>
                           <a:latin typeface="맑은 고딕"/>
                         </a:rPr>
@@ -27851,7 +27851,7 @@
                       <a:r>
                         <a:rPr sz="880" b="1">
                           <a:solidFill>
-                            <a:srgbClr val="1E293B"/>
+                            <a:srgbClr val="0F2942"/>
                           </a:solidFill>
                           <a:latin typeface="맑은 고딕"/>
                         </a:rPr>
@@ -27901,7 +27901,7 @@
                       <a:r>
                         <a:rPr sz="880" b="0">
                           <a:solidFill>
-                            <a:srgbClr val="1E293B"/>
+                            <a:srgbClr val="0F2942"/>
                           </a:solidFill>
                           <a:latin typeface="맑은 고딕"/>
                         </a:rPr>
@@ -27951,7 +27951,7 @@
                       <a:r>
                         <a:rPr sz="880" b="1">
                           <a:solidFill>
-                            <a:srgbClr val="1E293B"/>
+                            <a:srgbClr val="0F2942"/>
                           </a:solidFill>
                           <a:latin typeface="맑은 고딕"/>
                         </a:rPr>
@@ -28001,7 +28001,7 @@
                       <a:r>
                         <a:rPr sz="880" b="0">
                           <a:solidFill>
-                            <a:srgbClr val="1E293B"/>
+                            <a:srgbClr val="0F2942"/>
                           </a:solidFill>
                           <a:latin typeface="맑은 고딕"/>
                         </a:rPr>
@@ -28051,7 +28051,7 @@
                       <a:r>
                         <a:rPr sz="880" b="0">
                           <a:solidFill>
-                            <a:srgbClr val="1E293B"/>
+                            <a:srgbClr val="0F2942"/>
                           </a:solidFill>
                           <a:latin typeface="맑은 고딕"/>
                         </a:rPr>
@@ -28101,7 +28101,7 @@
                       <a:r>
                         <a:rPr sz="880" b="0">
                           <a:solidFill>
-                            <a:srgbClr val="1E293B"/>
+                            <a:srgbClr val="0F2942"/>
                           </a:solidFill>
                           <a:latin typeface="맑은 고딕"/>
                         </a:rPr>
@@ -28151,7 +28151,7 @@
                       <a:r>
                         <a:rPr sz="880" b="0">
                           <a:solidFill>
-                            <a:srgbClr val="1E293B"/>
+                            <a:srgbClr val="0F2942"/>
                           </a:solidFill>
                           <a:latin typeface="맑은 고딕"/>
                         </a:rPr>
@@ -28203,7 +28203,7 @@
                       <a:r>
                         <a:rPr sz="880" b="1">
                           <a:solidFill>
-                            <a:srgbClr val="1E293B"/>
+                            <a:srgbClr val="0F2942"/>
                           </a:solidFill>
                           <a:latin typeface="맑은 고딕"/>
                         </a:rPr>
@@ -28253,7 +28253,7 @@
                       <a:r>
                         <a:rPr sz="880" b="0">
                           <a:solidFill>
-                            <a:srgbClr val="1E293B"/>
+                            <a:srgbClr val="0F2942"/>
                           </a:solidFill>
                           <a:latin typeface="맑은 고딕"/>
                         </a:rPr>
@@ -28303,7 +28303,7 @@
                       <a:r>
                         <a:rPr sz="880" b="1">
                           <a:solidFill>
-                            <a:srgbClr val="1E293B"/>
+                            <a:srgbClr val="0F2942"/>
                           </a:solidFill>
                           <a:latin typeface="맑은 고딕"/>
                         </a:rPr>
@@ -28353,7 +28353,7 @@
                       <a:r>
                         <a:rPr sz="880" b="0">
                           <a:solidFill>
-                            <a:srgbClr val="1E293B"/>
+                            <a:srgbClr val="0F2942"/>
                           </a:solidFill>
                           <a:latin typeface="맑은 고딕"/>
                         </a:rPr>
@@ -28403,7 +28403,7 @@
                       <a:r>
                         <a:rPr sz="880" b="0">
                           <a:solidFill>
-                            <a:srgbClr val="1E293B"/>
+                            <a:srgbClr val="0F2942"/>
                           </a:solidFill>
                           <a:latin typeface="맑은 고딕"/>
                         </a:rPr>
@@ -28453,7 +28453,7 @@
                       <a:r>
                         <a:rPr sz="880" b="0">
                           <a:solidFill>
-                            <a:srgbClr val="1E293B"/>
+                            <a:srgbClr val="0F2942"/>
                           </a:solidFill>
                           <a:latin typeface="맑은 고딕"/>
                         </a:rPr>
@@ -28503,7 +28503,7 @@
                       <a:r>
                         <a:rPr sz="880" b="0">
                           <a:solidFill>
-                            <a:srgbClr val="1E293B"/>
+                            <a:srgbClr val="0F2942"/>
                           </a:solidFill>
                           <a:latin typeface="맑은 고딕"/>
                         </a:rPr>
@@ -28555,7 +28555,7 @@
                       <a:r>
                         <a:rPr sz="880" b="1">
                           <a:solidFill>
-                            <a:srgbClr val="1E293B"/>
+                            <a:srgbClr val="0F2942"/>
                           </a:solidFill>
                           <a:latin typeface="맑은 고딕"/>
                         </a:rPr>
@@ -28605,7 +28605,7 @@
                       <a:r>
                         <a:rPr sz="880" b="0">
                           <a:solidFill>
-                            <a:srgbClr val="1E293B"/>
+                            <a:srgbClr val="0F2942"/>
                           </a:solidFill>
                           <a:latin typeface="맑은 고딕"/>
                         </a:rPr>
@@ -28655,7 +28655,7 @@
                       <a:r>
                         <a:rPr sz="880" b="1">
                           <a:solidFill>
-                            <a:srgbClr val="1E293B"/>
+                            <a:srgbClr val="0F2942"/>
                           </a:solidFill>
                           <a:latin typeface="맑은 고딕"/>
                         </a:rPr>
@@ -28705,7 +28705,7 @@
                       <a:r>
                         <a:rPr sz="880" b="0">
                           <a:solidFill>
-                            <a:srgbClr val="1E293B"/>
+                            <a:srgbClr val="0F2942"/>
                           </a:solidFill>
                           <a:latin typeface="맑은 고딕"/>
                         </a:rPr>
@@ -28755,7 +28755,7 @@
                       <a:r>
                         <a:rPr sz="880" b="0">
                           <a:solidFill>
-                            <a:srgbClr val="1E293B"/>
+                            <a:srgbClr val="0F2942"/>
                           </a:solidFill>
                           <a:latin typeface="맑은 고딕"/>
                         </a:rPr>
@@ -28805,7 +28805,7 @@
                       <a:r>
                         <a:rPr sz="880" b="0">
                           <a:solidFill>
-                            <a:srgbClr val="1E293B"/>
+                            <a:srgbClr val="0F2942"/>
                           </a:solidFill>
                           <a:latin typeface="맑은 고딕"/>
                         </a:rPr>
@@ -28855,7 +28855,7 @@
                       <a:r>
                         <a:rPr sz="880" b="0">
                           <a:solidFill>
-                            <a:srgbClr val="1E293B"/>
+                            <a:srgbClr val="0F2942"/>
                           </a:solidFill>
                           <a:latin typeface="맑은 고딕"/>
                         </a:rPr>
@@ -28907,7 +28907,7 @@
                       <a:r>
                         <a:rPr sz="880" b="1">
                           <a:solidFill>
-                            <a:srgbClr val="1E293B"/>
+                            <a:srgbClr val="0F2942"/>
                           </a:solidFill>
                           <a:latin typeface="맑은 고딕"/>
                         </a:rPr>
@@ -28957,7 +28957,7 @@
                       <a:r>
                         <a:rPr sz="880" b="0">
                           <a:solidFill>
-                            <a:srgbClr val="1E293B"/>
+                            <a:srgbClr val="0F2942"/>
                           </a:solidFill>
                           <a:latin typeface="맑은 고딕"/>
                         </a:rPr>
@@ -29007,7 +29007,7 @@
                       <a:r>
                         <a:rPr sz="880" b="1">
                           <a:solidFill>
-                            <a:srgbClr val="1E293B"/>
+                            <a:srgbClr val="0F2942"/>
                           </a:solidFill>
                           <a:latin typeface="맑은 고딕"/>
                         </a:rPr>
@@ -29057,7 +29057,7 @@
                       <a:r>
                         <a:rPr sz="880" b="0">
                           <a:solidFill>
-                            <a:srgbClr val="1E293B"/>
+                            <a:srgbClr val="0F2942"/>
                           </a:solidFill>
                           <a:latin typeface="맑은 고딕"/>
                         </a:rPr>
@@ -29107,7 +29107,7 @@
                       <a:r>
                         <a:rPr sz="880" b="0">
                           <a:solidFill>
-                            <a:srgbClr val="1E293B"/>
+                            <a:srgbClr val="0F2942"/>
                           </a:solidFill>
                           <a:latin typeface="맑은 고딕"/>
                         </a:rPr>
@@ -29126,7 +29126,7 @@
                       <a:r>
                         <a:rPr sz="880" b="0">
                           <a:solidFill>
-                            <a:srgbClr val="1E293B"/>
+                            <a:srgbClr val="0F2942"/>
                           </a:solidFill>
                           <a:latin typeface="맑은 고딕"/>
                         </a:rPr>
@@ -29176,7 +29176,7 @@
                       <a:r>
                         <a:rPr sz="880" b="0">
                           <a:solidFill>
-                            <a:srgbClr val="1E293B"/>
+                            <a:srgbClr val="0F2942"/>
                           </a:solidFill>
                           <a:latin typeface="맑은 고딕"/>
                         </a:rPr>
@@ -29195,7 +29195,7 @@
                       <a:r>
                         <a:rPr sz="880" b="0">
                           <a:solidFill>
-                            <a:srgbClr val="1E293B"/>
+                            <a:srgbClr val="0F2942"/>
                           </a:solidFill>
                           <a:latin typeface="맑은 고딕"/>
                         </a:rPr>
@@ -29245,11 +29245,11 @@
                       <a:r>
                         <a:rPr sz="880" b="0">
                           <a:solidFill>
-                            <a:srgbClr val="1E293B"/>
+                            <a:srgbClr val="0F2942"/>
                           </a:solidFill>
                           <a:latin typeface="맑은 고딕"/>
                         </a:rPr>
-                        <a:t>연구원 ProductLab 실증자료 DB 구축, 원료/효능/임상 데이터 연계 API 개발</a:t>
+                        <a:t>연구원 PLM-Nexus 시험성적서 DB 구축, 원소재/성능규격/신뢰성 데이터 연계 API 개발</a:t>
                       </a:r>
                     </a:p>
                   </a:txBody>
